--- a/attached_assets/Cisco_Webex_Case_Comp_By_Agentix_Consulting_1772854922433.pptx
+++ b/attached_assets/Cisco_Webex_Case_Comp_By_Agentix_Consulting_1772854922433.pptx
@@ -10936,6 +10936,30 @@
           </a:p>
         </p:txBody>
       </p:sp>
+      <p:pic>
+        <p:nvPicPr>
+          <p:cNvPr id="20" name="Picture 19" descr="lana_circle.png"/>
+          <p:cNvPicPr>
+            <a:picLocks noChangeAspect="1"/>
+          </p:cNvPicPr>
+          <p:nvPr/>
+        </p:nvPicPr>
+        <p:blipFill>
+          <a:blip r:embed="rId5"/>
+          <a:stretch>
+            <a:fillRect/>
+          </a:stretch>
+        </p:blipFill>
+        <p:spPr>
+          <a:xfrm>
+            <a:off x="5365461" y="3710672"/>
+            <a:ext cx="2983924" cy="2983924"/>
+          </a:xfrm>
+          <a:prstGeom prst="rect">
+            <a:avLst/>
+          </a:prstGeom>
+        </p:spPr>
+      </p:pic>
     </p:spTree>
   </p:cSld>
   <p:clrMapOvr>

--- a/attached_assets/Cisco_Webex_Case_Comp_By_Agentix_Consulting_1772854922433.pptx
+++ b/attached_assets/Cisco_Webex_Case_Comp_By_Agentix_Consulting_1772854922433.pptx
@@ -3877,7 +3877,1030 @@
                 <a:cs typeface="Open Sans Bold"/>
                 <a:sym typeface="Open Sans Bold"/>
               </a:rPr>
-              <a:t>*Gantt Chart goes here*</a:t>
+              <a:t/>
+            </a:r>
+          </a:p>
+        </p:txBody>
+      </p:sp>
+      <p:sp>
+        <p:nvSpPr>
+          <p:cNvPr id="9" name="TextBox 8"/>
+          <p:cNvSpPr txBox="1"/>
+          <p:nvPr/>
+        </p:nvSpPr>
+        <p:spPr>
+          <a:xfrm>
+            <a:off x="1097280" y="1463040"/>
+            <a:ext cx="16459200" cy="914400"/>
+          </a:xfrm>
+          <a:prstGeom prst="rect">
+            <a:avLst/>
+          </a:prstGeom>
+          <a:noFill/>
+        </p:spPr>
+        <p:txBody>
+          <a:bodyPr wrap="square">
+            <a:spAutoFit/>
+          </a:bodyPr>
+          <a:lstStyle/>
+          <a:p>
+            <a:pPr algn="ctr">
+              <a:spcAft>
+                <a:spcPts val="200"/>
+              </a:spcAft>
+              <a:defRPr sz="1600" b="1">
+                <a:solidFill>
+                  <a:srgbClr val="204F69"/>
+                </a:solidFill>
+                <a:latin typeface="Lato"/>
+              </a:defRPr>
+            </a:pPr>
+            <a:r>
+              <a:t>Phased Rollout: Q3 2026 - Q4 2028</a:t>
+            </a:r>
+          </a:p>
+        </p:txBody>
+      </p:sp>
+      <p:sp>
+        <p:nvSpPr>
+          <p:cNvPr id="10" name="TextBox 9"/>
+          <p:cNvSpPr txBox="1"/>
+          <p:nvPr/>
+        </p:nvSpPr>
+        <p:spPr>
+          <a:xfrm>
+            <a:off x="1097280" y="2560320"/>
+            <a:ext cx="5029200" cy="2743200"/>
+          </a:xfrm>
+          <a:prstGeom prst="rect">
+            <a:avLst/>
+          </a:prstGeom>
+          <a:noFill/>
+        </p:spPr>
+        <p:txBody>
+          <a:bodyPr wrap="square">
+            <a:spAutoFit/>
+          </a:bodyPr>
+          <a:lstStyle/>
+          <a:p>
+            <a:pPr algn="l">
+              <a:spcAft>
+                <a:spcPts val="200"/>
+              </a:spcAft>
+              <a:defRPr sz="1300" b="1">
+                <a:solidFill>
+                  <a:srgbClr val="333333"/>
+                </a:solidFill>
+                <a:latin typeface="TT Commons Pro"/>
+              </a:defRPr>
+            </a:pPr>
+            <a:r>
+              <a:t>Solution 1: AI Orchestrator</a:t>
+            </a:r>
+          </a:p>
+          <a:p>
+            <a:pPr algn="l">
+              <a:spcAft>
+                <a:spcPts val="200"/>
+              </a:spcAft>
+              <a:defRPr sz="400" b="0">
+                <a:solidFill>
+                  <a:srgbClr val="333333"/>
+                </a:solidFill>
+                <a:latin typeface="TT Commons Pro"/>
+              </a:defRPr>
+            </a:pPr>
+          </a:p>
+          <a:p>
+            <a:pPr algn="l">
+              <a:spcAft>
+                <a:spcPts val="200"/>
+              </a:spcAft>
+              <a:defRPr sz="1000" b="0">
+                <a:solidFill>
+                  <a:srgbClr val="333333"/>
+                </a:solidFill>
+                <a:latin typeface="TT Commons Pro"/>
+              </a:defRPr>
+            </a:pPr>
+            <a:r>
+              <a:t>Q3-Q4 2026: NLP pipeline + task intent detection</a:t>
+            </a:r>
+          </a:p>
+          <a:p>
+            <a:pPr algn="l">
+              <a:spcAft>
+                <a:spcPts val="200"/>
+              </a:spcAft>
+              <a:defRPr sz="1000" b="0">
+                <a:solidFill>
+                  <a:srgbClr val="333333"/>
+                </a:solidFill>
+                <a:latin typeface="TT Commons Pro"/>
+              </a:defRPr>
+            </a:pPr>
+            <a:r>
+              <a:t>Q1-Q2 2027: A2A integrations (Jira, Salesforce, SAP)</a:t>
+            </a:r>
+          </a:p>
+          <a:p>
+            <a:pPr algn="l">
+              <a:spcAft>
+                <a:spcPts val="200"/>
+              </a:spcAft>
+              <a:defRPr sz="1000" b="0">
+                <a:solidFill>
+                  <a:srgbClr val="333333"/>
+                </a:solidFill>
+                <a:latin typeface="TT Commons Pro"/>
+              </a:defRPr>
+            </a:pPr>
+            <a:r>
+              <a:t>Q3 2027: PREPARE phase (auto-slides, predicted Q&amp;A)</a:t>
+            </a:r>
+          </a:p>
+          <a:p>
+            <a:pPr algn="l">
+              <a:spcAft>
+                <a:spcPts val="200"/>
+              </a:spcAft>
+              <a:defRPr sz="1000" b="0">
+                <a:solidFill>
+                  <a:srgbClr val="333333"/>
+                </a:solidFill>
+                <a:latin typeface="TT Commons Pro"/>
+              </a:defRPr>
+            </a:pPr>
+            <a:r>
+              <a:t>Q4 2027: FOLLOW-UP phase + enterprise rollout</a:t>
+            </a:r>
+          </a:p>
+        </p:txBody>
+      </p:sp>
+      <p:sp>
+        <p:nvSpPr>
+          <p:cNvPr id="11" name="TextBox 10"/>
+          <p:cNvSpPr txBox="1"/>
+          <p:nvPr/>
+        </p:nvSpPr>
+        <p:spPr>
+          <a:xfrm>
+            <a:off x="6675120" y="2560320"/>
+            <a:ext cx="5029200" cy="2743200"/>
+          </a:xfrm>
+          <a:prstGeom prst="rect">
+            <a:avLst/>
+          </a:prstGeom>
+          <a:noFill/>
+        </p:spPr>
+        <p:txBody>
+          <a:bodyPr wrap="square">
+            <a:spAutoFit/>
+          </a:bodyPr>
+          <a:lstStyle/>
+          <a:p>
+            <a:pPr algn="l">
+              <a:spcAft>
+                <a:spcPts val="200"/>
+              </a:spcAft>
+              <a:defRPr sz="1300" b="1">
+                <a:solidFill>
+                  <a:srgbClr val="333333"/>
+                </a:solidFill>
+                <a:latin typeface="TT Commons Pro"/>
+              </a:defRPr>
+            </a:pPr>
+            <a:r>
+              <a:t>Solution 2: VIBE</a:t>
+            </a:r>
+          </a:p>
+          <a:p>
+            <a:pPr algn="l">
+              <a:spcAft>
+                <a:spcPts val="200"/>
+              </a:spcAft>
+              <a:defRPr sz="400" b="0">
+                <a:solidFill>
+                  <a:srgbClr val="333333"/>
+                </a:solidFill>
+                <a:latin typeface="TT Commons Pro"/>
+              </a:defRPr>
+            </a:pPr>
+          </a:p>
+          <a:p>
+            <a:pPr algn="l">
+              <a:spcAft>
+                <a:spcPts val="200"/>
+              </a:spcAft>
+              <a:defRPr sz="1000" b="0">
+                <a:solidFill>
+                  <a:srgbClr val="333333"/>
+                </a:solidFill>
+                <a:latin typeface="TT Commons Pro"/>
+              </a:defRPr>
+            </a:pPr>
+            <a:r>
+              <a:t>Q3 2026: Voice Boost + DNN noise removal</a:t>
+            </a:r>
+          </a:p>
+          <a:p>
+            <a:pPr algn="l">
+              <a:spcAft>
+                <a:spcPts val="200"/>
+              </a:spcAft>
+              <a:defRPr sz="1000" b="0">
+                <a:solidFill>
+                  <a:srgbClr val="333333"/>
+                </a:solidFill>
+                <a:latin typeface="TT Commons Pro"/>
+              </a:defRPr>
+            </a:pPr>
+            <a:r>
+              <a:t>Q4 2026: ASR + Live Translation (top 20 languages)</a:t>
+            </a:r>
+          </a:p>
+          <a:p>
+            <a:pPr algn="l">
+              <a:spcAft>
+                <a:spcPts val="200"/>
+              </a:spcAft>
+              <a:defRPr sz="1000" b="0">
+                <a:solidFill>
+                  <a:srgbClr val="333333"/>
+                </a:solidFill>
+                <a:latin typeface="TT Commons Pro"/>
+              </a:defRPr>
+            </a:pPr>
+            <a:r>
+              <a:t>Q1 2027: Type-to-Speak + Simple Mode</a:t>
+            </a:r>
+          </a:p>
+          <a:p>
+            <a:pPr algn="l">
+              <a:spcAft>
+                <a:spcPts val="200"/>
+              </a:spcAft>
+              <a:defRPr sz="1000" b="0">
+                <a:solidFill>
+                  <a:srgbClr val="333333"/>
+                </a:solidFill>
+                <a:latin typeface="TT Commons Pro"/>
+              </a:defRPr>
+            </a:pPr>
+            <a:r>
+              <a:t>Q2 2027: Q&amp;A Close-Loop + full 100+ languages</a:t>
+            </a:r>
+          </a:p>
+        </p:txBody>
+      </p:sp>
+      <p:sp>
+        <p:nvSpPr>
+          <p:cNvPr id="12" name="TextBox 11"/>
+          <p:cNvSpPr txBox="1"/>
+          <p:nvPr/>
+        </p:nvSpPr>
+        <p:spPr>
+          <a:xfrm>
+            <a:off x="12252960" y="2560320"/>
+            <a:ext cx="5029200" cy="2743200"/>
+          </a:xfrm>
+          <a:prstGeom prst="rect">
+            <a:avLst/>
+          </a:prstGeom>
+          <a:noFill/>
+        </p:spPr>
+        <p:txBody>
+          <a:bodyPr wrap="square">
+            <a:spAutoFit/>
+          </a:bodyPr>
+          <a:lstStyle/>
+          <a:p>
+            <a:pPr algn="l">
+              <a:spcAft>
+                <a:spcPts val="200"/>
+              </a:spcAft>
+              <a:defRPr sz="1300" b="1">
+                <a:solidFill>
+                  <a:srgbClr val="333333"/>
+                </a:solidFill>
+                <a:latin typeface="TT Commons Pro"/>
+              </a:defRPr>
+            </a:pPr>
+            <a:r>
+              <a:t>Solution 3: Marketplace</a:t>
+            </a:r>
+          </a:p>
+          <a:p>
+            <a:pPr algn="l">
+              <a:spcAft>
+                <a:spcPts val="200"/>
+              </a:spcAft>
+              <a:defRPr sz="400" b="0">
+                <a:solidFill>
+                  <a:srgbClr val="333333"/>
+                </a:solidFill>
+                <a:latin typeface="TT Commons Pro"/>
+              </a:defRPr>
+            </a:pPr>
+          </a:p>
+          <a:p>
+            <a:pPr algn="l">
+              <a:spcAft>
+                <a:spcPts val="200"/>
+              </a:spcAft>
+              <a:defRPr sz="1000" b="0">
+                <a:solidFill>
+                  <a:srgbClr val="333333"/>
+                </a:solidFill>
+                <a:latin typeface="TT Commons Pro"/>
+              </a:defRPr>
+            </a:pPr>
+            <a:r>
+              <a:t>Q3-Q4 2026: SDK development + certification pipeline</a:t>
+            </a:r>
+          </a:p>
+          <a:p>
+            <a:pPr algn="l">
+              <a:spcAft>
+                <a:spcPts val="200"/>
+              </a:spcAft>
+              <a:defRPr sz="1000" b="0">
+                <a:solidFill>
+                  <a:srgbClr val="333333"/>
+                </a:solidFill>
+                <a:latin typeface="TT Commons Pro"/>
+              </a:defRPr>
+            </a:pPr>
+            <a:r>
+              <a:t>Q1 2027: Beta with 20-30 first-party agents</a:t>
+            </a:r>
+          </a:p>
+          <a:p>
+            <a:pPr algn="l">
+              <a:spcAft>
+                <a:spcPts val="200"/>
+              </a:spcAft>
+              <a:defRPr sz="1000" b="0">
+                <a:solidFill>
+                  <a:srgbClr val="333333"/>
+                </a:solidFill>
+                <a:latin typeface="TT Commons Pro"/>
+              </a:defRPr>
+            </a:pPr>
+            <a:r>
+              <a:t>Q2-Q3 2027: Public launch + developer grants program</a:t>
+            </a:r>
+          </a:p>
+          <a:p>
+            <a:pPr algn="l">
+              <a:spcAft>
+                <a:spcPts val="200"/>
+              </a:spcAft>
+              <a:defRPr sz="1000" b="0">
+                <a:solidFill>
+                  <a:srgbClr val="333333"/>
+                </a:solidFill>
+                <a:latin typeface="TT Commons Pro"/>
+              </a:defRPr>
+            </a:pPr>
+            <a:r>
+              <a:t>Q4 2027-2028: Scale to 500+ agents, revenue model</a:t>
+            </a:r>
+          </a:p>
+        </p:txBody>
+      </p:sp>
+      <p:sp>
+        <p:nvSpPr>
+          <p:cNvPr id="13" name="TextBox 12"/>
+          <p:cNvSpPr txBox="1"/>
+          <p:nvPr/>
+        </p:nvSpPr>
+        <p:spPr>
+          <a:xfrm>
+            <a:off x="1371600" y="5303520"/>
+            <a:ext cx="1554480" cy="320040"/>
+          </a:xfrm>
+          <a:prstGeom prst="rect">
+            <a:avLst/>
+          </a:prstGeom>
+          <a:noFill/>
+        </p:spPr>
+        <p:txBody>
+          <a:bodyPr wrap="square">
+            <a:spAutoFit/>
+          </a:bodyPr>
+          <a:lstStyle/>
+          <a:p>
+            <a:pPr algn="ctr">
+              <a:defRPr sz="800" b="1">
+                <a:solidFill>
+                  <a:srgbClr val="204F69"/>
+                </a:solidFill>
+                <a:latin typeface="TT Commons Pro"/>
+              </a:defRPr>
+            </a:pPr>
+            <a:r>
+              <a:t>Q3'26</a:t>
+            </a:r>
+          </a:p>
+        </p:txBody>
+      </p:sp>
+      <p:sp>
+        <p:nvSpPr>
+          <p:cNvPr id="14" name="TextBox 13"/>
+          <p:cNvSpPr txBox="1"/>
+          <p:nvPr/>
+        </p:nvSpPr>
+        <p:spPr>
+          <a:xfrm>
+            <a:off x="2926080" y="5303520"/>
+            <a:ext cx="1554480" cy="320040"/>
+          </a:xfrm>
+          <a:prstGeom prst="rect">
+            <a:avLst/>
+          </a:prstGeom>
+          <a:noFill/>
+        </p:spPr>
+        <p:txBody>
+          <a:bodyPr wrap="square">
+            <a:spAutoFit/>
+          </a:bodyPr>
+          <a:lstStyle/>
+          <a:p>
+            <a:pPr algn="ctr">
+              <a:defRPr sz="800" b="1">
+                <a:solidFill>
+                  <a:srgbClr val="204F69"/>
+                </a:solidFill>
+                <a:latin typeface="TT Commons Pro"/>
+              </a:defRPr>
+            </a:pPr>
+            <a:r>
+              <a:t>Q4'26</a:t>
+            </a:r>
+          </a:p>
+        </p:txBody>
+      </p:sp>
+      <p:sp>
+        <p:nvSpPr>
+          <p:cNvPr id="15" name="TextBox 14"/>
+          <p:cNvSpPr txBox="1"/>
+          <p:nvPr/>
+        </p:nvSpPr>
+        <p:spPr>
+          <a:xfrm>
+            <a:off x="4480560" y="5303520"/>
+            <a:ext cx="1554480" cy="320040"/>
+          </a:xfrm>
+          <a:prstGeom prst="rect">
+            <a:avLst/>
+          </a:prstGeom>
+          <a:noFill/>
+        </p:spPr>
+        <p:txBody>
+          <a:bodyPr wrap="square">
+            <a:spAutoFit/>
+          </a:bodyPr>
+          <a:lstStyle/>
+          <a:p>
+            <a:pPr algn="ctr">
+              <a:defRPr sz="800" b="1">
+                <a:solidFill>
+                  <a:srgbClr val="204F69"/>
+                </a:solidFill>
+                <a:latin typeface="TT Commons Pro"/>
+              </a:defRPr>
+            </a:pPr>
+            <a:r>
+              <a:t>Q1'27</a:t>
+            </a:r>
+          </a:p>
+        </p:txBody>
+      </p:sp>
+      <p:sp>
+        <p:nvSpPr>
+          <p:cNvPr id="16" name="TextBox 15"/>
+          <p:cNvSpPr txBox="1"/>
+          <p:nvPr/>
+        </p:nvSpPr>
+        <p:spPr>
+          <a:xfrm>
+            <a:off x="6035040" y="5303520"/>
+            <a:ext cx="1554480" cy="320040"/>
+          </a:xfrm>
+          <a:prstGeom prst="rect">
+            <a:avLst/>
+          </a:prstGeom>
+          <a:noFill/>
+        </p:spPr>
+        <p:txBody>
+          <a:bodyPr wrap="square">
+            <a:spAutoFit/>
+          </a:bodyPr>
+          <a:lstStyle/>
+          <a:p>
+            <a:pPr algn="ctr">
+              <a:defRPr sz="800" b="1">
+                <a:solidFill>
+                  <a:srgbClr val="204F69"/>
+                </a:solidFill>
+                <a:latin typeface="TT Commons Pro"/>
+              </a:defRPr>
+            </a:pPr>
+            <a:r>
+              <a:t>Q2'27</a:t>
+            </a:r>
+          </a:p>
+        </p:txBody>
+      </p:sp>
+      <p:sp>
+        <p:nvSpPr>
+          <p:cNvPr id="17" name="TextBox 16"/>
+          <p:cNvSpPr txBox="1"/>
+          <p:nvPr/>
+        </p:nvSpPr>
+        <p:spPr>
+          <a:xfrm>
+            <a:off x="7589520" y="5303520"/>
+            <a:ext cx="1554480" cy="320040"/>
+          </a:xfrm>
+          <a:prstGeom prst="rect">
+            <a:avLst/>
+          </a:prstGeom>
+          <a:noFill/>
+        </p:spPr>
+        <p:txBody>
+          <a:bodyPr wrap="square">
+            <a:spAutoFit/>
+          </a:bodyPr>
+          <a:lstStyle/>
+          <a:p>
+            <a:pPr algn="ctr">
+              <a:defRPr sz="800" b="1">
+                <a:solidFill>
+                  <a:srgbClr val="204F69"/>
+                </a:solidFill>
+                <a:latin typeface="TT Commons Pro"/>
+              </a:defRPr>
+            </a:pPr>
+            <a:r>
+              <a:t>Q3'27</a:t>
+            </a:r>
+          </a:p>
+        </p:txBody>
+      </p:sp>
+      <p:sp>
+        <p:nvSpPr>
+          <p:cNvPr id="18" name="TextBox 17"/>
+          <p:cNvSpPr txBox="1"/>
+          <p:nvPr/>
+        </p:nvSpPr>
+        <p:spPr>
+          <a:xfrm>
+            <a:off x="9144000" y="5303520"/>
+            <a:ext cx="1554480" cy="320040"/>
+          </a:xfrm>
+          <a:prstGeom prst="rect">
+            <a:avLst/>
+          </a:prstGeom>
+          <a:noFill/>
+        </p:spPr>
+        <p:txBody>
+          <a:bodyPr wrap="square">
+            <a:spAutoFit/>
+          </a:bodyPr>
+          <a:lstStyle/>
+          <a:p>
+            <a:pPr algn="ctr">
+              <a:defRPr sz="800" b="1">
+                <a:solidFill>
+                  <a:srgbClr val="204F69"/>
+                </a:solidFill>
+                <a:latin typeface="TT Commons Pro"/>
+              </a:defRPr>
+            </a:pPr>
+            <a:r>
+              <a:t>Q4'27</a:t>
+            </a:r>
+          </a:p>
+        </p:txBody>
+      </p:sp>
+      <p:sp>
+        <p:nvSpPr>
+          <p:cNvPr id="19" name="TextBox 18"/>
+          <p:cNvSpPr txBox="1"/>
+          <p:nvPr/>
+        </p:nvSpPr>
+        <p:spPr>
+          <a:xfrm>
+            <a:off x="10698480" y="5303520"/>
+            <a:ext cx="1554480" cy="320040"/>
+          </a:xfrm>
+          <a:prstGeom prst="rect">
+            <a:avLst/>
+          </a:prstGeom>
+          <a:noFill/>
+        </p:spPr>
+        <p:txBody>
+          <a:bodyPr wrap="square">
+            <a:spAutoFit/>
+          </a:bodyPr>
+          <a:lstStyle/>
+          <a:p>
+            <a:pPr algn="ctr">
+              <a:defRPr sz="800" b="1">
+                <a:solidFill>
+                  <a:srgbClr val="204F69"/>
+                </a:solidFill>
+                <a:latin typeface="TT Commons Pro"/>
+              </a:defRPr>
+            </a:pPr>
+            <a:r>
+              <a:t>Q1'28</a:t>
+            </a:r>
+          </a:p>
+        </p:txBody>
+      </p:sp>
+      <p:sp>
+        <p:nvSpPr>
+          <p:cNvPr id="20" name="TextBox 19"/>
+          <p:cNvSpPr txBox="1"/>
+          <p:nvPr/>
+        </p:nvSpPr>
+        <p:spPr>
+          <a:xfrm>
+            <a:off x="12252960" y="5303520"/>
+            <a:ext cx="1554480" cy="320040"/>
+          </a:xfrm>
+          <a:prstGeom prst="rect">
+            <a:avLst/>
+          </a:prstGeom>
+          <a:noFill/>
+        </p:spPr>
+        <p:txBody>
+          <a:bodyPr wrap="square">
+            <a:spAutoFit/>
+          </a:bodyPr>
+          <a:lstStyle/>
+          <a:p>
+            <a:pPr algn="ctr">
+              <a:defRPr sz="800" b="1">
+                <a:solidFill>
+                  <a:srgbClr val="204F69"/>
+                </a:solidFill>
+                <a:latin typeface="TT Commons Pro"/>
+              </a:defRPr>
+            </a:pPr>
+            <a:r>
+              <a:t>Q2'28</a:t>
+            </a:r>
+          </a:p>
+        </p:txBody>
+      </p:sp>
+      <p:sp>
+        <p:nvSpPr>
+          <p:cNvPr id="21" name="TextBox 20"/>
+          <p:cNvSpPr txBox="1"/>
+          <p:nvPr/>
+        </p:nvSpPr>
+        <p:spPr>
+          <a:xfrm>
+            <a:off x="13807440" y="5303520"/>
+            <a:ext cx="1554480" cy="320040"/>
+          </a:xfrm>
+          <a:prstGeom prst="rect">
+            <a:avLst/>
+          </a:prstGeom>
+          <a:noFill/>
+        </p:spPr>
+        <p:txBody>
+          <a:bodyPr wrap="square">
+            <a:spAutoFit/>
+          </a:bodyPr>
+          <a:lstStyle/>
+          <a:p>
+            <a:pPr algn="ctr">
+              <a:defRPr sz="800" b="1">
+                <a:solidFill>
+                  <a:srgbClr val="204F69"/>
+                </a:solidFill>
+                <a:latin typeface="TT Commons Pro"/>
+              </a:defRPr>
+            </a:pPr>
+            <a:r>
+              <a:t>Q3'28</a:t>
+            </a:r>
+          </a:p>
+        </p:txBody>
+      </p:sp>
+      <p:sp>
+        <p:nvSpPr>
+          <p:cNvPr id="22" name="TextBox 21"/>
+          <p:cNvSpPr txBox="1"/>
+          <p:nvPr/>
+        </p:nvSpPr>
+        <p:spPr>
+          <a:xfrm>
+            <a:off x="15361919" y="5303520"/>
+            <a:ext cx="1554480" cy="320040"/>
+          </a:xfrm>
+          <a:prstGeom prst="rect">
+            <a:avLst/>
+          </a:prstGeom>
+          <a:noFill/>
+        </p:spPr>
+        <p:txBody>
+          <a:bodyPr wrap="square">
+            <a:spAutoFit/>
+          </a:bodyPr>
+          <a:lstStyle/>
+          <a:p>
+            <a:pPr algn="ctr">
+              <a:defRPr sz="800" b="1">
+                <a:solidFill>
+                  <a:srgbClr val="204F69"/>
+                </a:solidFill>
+                <a:latin typeface="TT Commons Pro"/>
+              </a:defRPr>
+            </a:pPr>
+            <a:r>
+              <a:t>Q4'28</a:t>
+            </a:r>
+          </a:p>
+        </p:txBody>
+      </p:sp>
+      <p:sp>
+        <p:nvSpPr>
+          <p:cNvPr id="23" name="Rectangle 22"/>
+          <p:cNvSpPr/>
+          <p:nvPr/>
+        </p:nvSpPr>
+        <p:spPr>
+          <a:xfrm>
+            <a:off x="1371600" y="5669280"/>
+            <a:ext cx="9326880" cy="411480"/>
+          </a:xfrm>
+          <a:prstGeom prst="rect">
+            <a:avLst/>
+          </a:prstGeom>
+          <a:solidFill>
+            <a:srgbClr val="049FD9"/>
+          </a:solidFill>
+          <a:ln>
+            <a:noFill/>
+          </a:ln>
+        </p:spPr>
+        <p:style>
+          <a:lnRef idx="1">
+            <a:schemeClr val="accent1"/>
+          </a:lnRef>
+          <a:fillRef idx="3">
+            <a:schemeClr val="accent1"/>
+          </a:fillRef>
+          <a:effectRef idx="2">
+            <a:schemeClr val="accent1"/>
+          </a:effectRef>
+          <a:fontRef idx="minor">
+            <a:schemeClr val="lt1"/>
+          </a:fontRef>
+        </p:style>
+        <p:txBody>
+          <a:bodyPr rtlCol="0" anchor="ctr"/>
+          <a:lstStyle/>
+          <a:p>
+            <a:pPr algn="ctr"/>
+          </a:p>
+        </p:txBody>
+      </p:sp>
+      <p:sp>
+        <p:nvSpPr>
+          <p:cNvPr id="24" name="TextBox 23"/>
+          <p:cNvSpPr txBox="1"/>
+          <p:nvPr/>
+        </p:nvSpPr>
+        <p:spPr>
+          <a:xfrm>
+            <a:off x="1554480" y="5715000"/>
+            <a:ext cx="8961119" cy="320040"/>
+          </a:xfrm>
+          <a:prstGeom prst="rect">
+            <a:avLst/>
+          </a:prstGeom>
+          <a:noFill/>
+        </p:spPr>
+        <p:txBody>
+          <a:bodyPr wrap="square">
+            <a:spAutoFit/>
+          </a:bodyPr>
+          <a:lstStyle/>
+          <a:p>
+            <a:pPr algn="l">
+              <a:defRPr sz="900" b="1">
+                <a:solidFill>
+                  <a:srgbClr val="FFFFFF"/>
+                </a:solidFill>
+                <a:latin typeface="TT Commons Pro"/>
+              </a:defRPr>
+            </a:pPr>
+            <a:r>
+              <a:t>Solution 1: AI Orchestrator</a:t>
+            </a:r>
+          </a:p>
+        </p:txBody>
+      </p:sp>
+      <p:sp>
+        <p:nvSpPr>
+          <p:cNvPr id="25" name="Rectangle 24"/>
+          <p:cNvSpPr/>
+          <p:nvPr/>
+        </p:nvSpPr>
+        <p:spPr>
+          <a:xfrm>
+            <a:off x="1371600" y="6217920"/>
+            <a:ext cx="6217920" cy="411480"/>
+          </a:xfrm>
+          <a:prstGeom prst="rect">
+            <a:avLst/>
+          </a:prstGeom>
+          <a:solidFill>
+            <a:srgbClr val="27AE60"/>
+          </a:solidFill>
+          <a:ln>
+            <a:noFill/>
+          </a:ln>
+        </p:spPr>
+        <p:style>
+          <a:lnRef idx="1">
+            <a:schemeClr val="accent1"/>
+          </a:lnRef>
+          <a:fillRef idx="3">
+            <a:schemeClr val="accent1"/>
+          </a:fillRef>
+          <a:effectRef idx="2">
+            <a:schemeClr val="accent1"/>
+          </a:effectRef>
+          <a:fontRef idx="minor">
+            <a:schemeClr val="lt1"/>
+          </a:fontRef>
+        </p:style>
+        <p:txBody>
+          <a:bodyPr rtlCol="0" anchor="ctr"/>
+          <a:lstStyle/>
+          <a:p>
+            <a:pPr algn="ctr"/>
+          </a:p>
+        </p:txBody>
+      </p:sp>
+      <p:sp>
+        <p:nvSpPr>
+          <p:cNvPr id="26" name="TextBox 25"/>
+          <p:cNvSpPr txBox="1"/>
+          <p:nvPr/>
+        </p:nvSpPr>
+        <p:spPr>
+          <a:xfrm>
+            <a:off x="1554480" y="6263640"/>
+            <a:ext cx="5852159" cy="320040"/>
+          </a:xfrm>
+          <a:prstGeom prst="rect">
+            <a:avLst/>
+          </a:prstGeom>
+          <a:noFill/>
+        </p:spPr>
+        <p:txBody>
+          <a:bodyPr wrap="square">
+            <a:spAutoFit/>
+          </a:bodyPr>
+          <a:lstStyle/>
+          <a:p>
+            <a:pPr algn="l">
+              <a:defRPr sz="900" b="1">
+                <a:solidFill>
+                  <a:srgbClr val="FFFFFF"/>
+                </a:solidFill>
+                <a:latin typeface="TT Commons Pro"/>
+              </a:defRPr>
+            </a:pPr>
+            <a:r>
+              <a:t>Solution 2: VIBE</a:t>
+            </a:r>
+          </a:p>
+        </p:txBody>
+      </p:sp>
+      <p:sp>
+        <p:nvSpPr>
+          <p:cNvPr id="27" name="Rectangle 26"/>
+          <p:cNvSpPr/>
+          <p:nvPr/>
+        </p:nvSpPr>
+        <p:spPr>
+          <a:xfrm>
+            <a:off x="1371600" y="6766560"/>
+            <a:ext cx="15544800" cy="411480"/>
+          </a:xfrm>
+          <a:prstGeom prst="rect">
+            <a:avLst/>
+          </a:prstGeom>
+          <a:solidFill>
+            <a:srgbClr val="8E44AD"/>
+          </a:solidFill>
+          <a:ln>
+            <a:noFill/>
+          </a:ln>
+        </p:spPr>
+        <p:style>
+          <a:lnRef idx="1">
+            <a:schemeClr val="accent1"/>
+          </a:lnRef>
+          <a:fillRef idx="3">
+            <a:schemeClr val="accent1"/>
+          </a:fillRef>
+          <a:effectRef idx="2">
+            <a:schemeClr val="accent1"/>
+          </a:effectRef>
+          <a:fontRef idx="minor">
+            <a:schemeClr val="lt1"/>
+          </a:fontRef>
+        </p:style>
+        <p:txBody>
+          <a:bodyPr rtlCol="0" anchor="ctr"/>
+          <a:lstStyle/>
+          <a:p>
+            <a:pPr algn="ctr"/>
+          </a:p>
+        </p:txBody>
+      </p:sp>
+      <p:sp>
+        <p:nvSpPr>
+          <p:cNvPr id="28" name="TextBox 27"/>
+          <p:cNvSpPr txBox="1"/>
+          <p:nvPr/>
+        </p:nvSpPr>
+        <p:spPr>
+          <a:xfrm>
+            <a:off x="1554480" y="6812280"/>
+            <a:ext cx="15179040" cy="320040"/>
+          </a:xfrm>
+          <a:prstGeom prst="rect">
+            <a:avLst/>
+          </a:prstGeom>
+          <a:noFill/>
+        </p:spPr>
+        <p:txBody>
+          <a:bodyPr wrap="square">
+            <a:spAutoFit/>
+          </a:bodyPr>
+          <a:lstStyle/>
+          <a:p>
+            <a:pPr algn="l">
+              <a:defRPr sz="900" b="1">
+                <a:solidFill>
+                  <a:srgbClr val="FFFFFF"/>
+                </a:solidFill>
+                <a:latin typeface="TT Commons Pro"/>
+              </a:defRPr>
+            </a:pPr>
+            <a:r>
+              <a:t>Solution 3: Marketplace</a:t>
+            </a:r>
+          </a:p>
+        </p:txBody>
+      </p:sp>
+      <p:sp>
+        <p:nvSpPr>
+          <p:cNvPr id="29" name="TextBox 28"/>
+          <p:cNvSpPr txBox="1"/>
+          <p:nvPr/>
+        </p:nvSpPr>
+        <p:spPr>
+          <a:xfrm>
+            <a:off x="1097280" y="7772400"/>
+            <a:ext cx="16459200" cy="1371600"/>
+          </a:xfrm>
+          <a:prstGeom prst="rect">
+            <a:avLst/>
+          </a:prstGeom>
+          <a:noFill/>
+        </p:spPr>
+        <p:txBody>
+          <a:bodyPr wrap="square">
+            <a:spAutoFit/>
+          </a:bodyPr>
+          <a:lstStyle/>
+          <a:p>
+            <a:pPr algn="ctr">
+              <a:spcAft>
+                <a:spcPts val="200"/>
+              </a:spcAft>
+              <a:defRPr sz="1000" b="1">
+                <a:solidFill>
+                  <a:srgbClr val="049FD9"/>
+                </a:solidFill>
+                <a:latin typeface="TT Commons Pro"/>
+              </a:defRPr>
+            </a:pPr>
+            <a:r>
+              <a:t>Key Milestones:  Q4 2026 - VIBE Voice Boost GA  |  Q2 2027 - Marketplace Public Launch  |  Q4 2027 - Full Orchestrator Rollout  |  FY2028 - 500+ Certified Agents</a:t>
             </a:r>
           </a:p>
         </p:txBody>
@@ -6874,7 +7897,7 @@
               </a:spcBef>
             </a:pPr>
             <a:r>
-              <a:rPr lang="en-US" sz="2404">
+              <a:rPr lang="en-US" sz="1000">
                 <a:solidFill>
                   <a:srgbClr val="F2F6FC"/>
                 </a:solidFill>
@@ -6883,7 +7906,7 @@
                 <a:cs typeface="Open Sans"/>
                 <a:sym typeface="Open Sans"/>
               </a:rPr>
-              <a:t>Text</a:t>
+              <a:t>AI hallucination in task drafts may produce incorrect actions or follow-ups</a:t>
             </a:r>
           </a:p>
         </p:txBody>
@@ -6918,7 +7941,7 @@
               </a:spcBef>
             </a:pPr>
             <a:r>
-              <a:rPr lang="en-US" sz="2404">
+              <a:rPr lang="en-US" sz="1000">
                 <a:solidFill>
                   <a:srgbClr val="F2F6FC"/>
                 </a:solidFill>
@@ -6927,7 +7950,7 @@
                 <a:cs typeface="Open Sans"/>
                 <a:sym typeface="Open Sans"/>
               </a:rPr>
-              <a:t>Text</a:t>
+              <a:t>Deepfake perception risk: users may distrust AI-generated voice output</a:t>
             </a:r>
           </a:p>
         </p:txBody>
@@ -6962,7 +7985,7 @@
               </a:spcBef>
             </a:pPr>
             <a:r>
-              <a:rPr lang="en-US" sz="2404">
+              <a:rPr lang="en-US" sz="1000">
                 <a:solidFill>
                   <a:srgbClr val="F2F6FC"/>
                 </a:solidFill>
@@ -6971,7 +7994,7 @@
                 <a:cs typeface="Open Sans"/>
                 <a:sym typeface="Open Sans"/>
               </a:rPr>
-              <a:t>T</a:t>
+              <a:t>Marketplace cold-start: insufficient agents at launch reduces user adoption</a:t>
             </a:r>
             <a:r>
               <a:rPr lang="en-US" sz="2404">
@@ -6983,7 +8006,7 @@
                 <a:cs typeface="Open Sans"/>
                 <a:sym typeface="Open Sans"/>
               </a:rPr>
-              <a:t>ext</a:t>
+              <a:t/>
             </a:r>
           </a:p>
         </p:txBody>
@@ -7018,7 +8041,7 @@
               </a:spcBef>
             </a:pPr>
             <a:r>
-              <a:rPr lang="en-US" sz="2404">
+              <a:rPr lang="en-US" sz="1000">
                 <a:solidFill>
                   <a:srgbClr val="F2F6FC"/>
                 </a:solidFill>
@@ -7027,7 +8050,7 @@
                 <a:cs typeface="Open Sans"/>
                 <a:sym typeface="Open Sans"/>
               </a:rPr>
-              <a:t>T</a:t>
+              <a:t>Mandatory labeling ("Spoken by VIBE for [User]"), meeting-start notification, opt-in only</a:t>
             </a:r>
             <a:r>
               <a:rPr lang="en-US" sz="2404">
@@ -7039,7 +8062,7 @@
                 <a:cs typeface="Open Sans"/>
                 <a:sym typeface="Open Sans"/>
               </a:rPr>
-              <a:t>e</a:t>
+              <a:t/>
             </a:r>
             <a:r>
               <a:rPr lang="en-US" sz="2404">
@@ -7051,7 +8074,7 @@
                 <a:cs typeface="Open Sans"/>
                 <a:sym typeface="Open Sans"/>
               </a:rPr>
-              <a:t>x</a:t>
+              <a:t/>
             </a:r>
             <a:r>
               <a:rPr lang="en-US" sz="2404">
@@ -7063,7 +8086,7 @@
                 <a:cs typeface="Open Sans"/>
                 <a:sym typeface="Open Sans"/>
               </a:rPr>
-              <a:t>t</a:t>
+              <a:t/>
             </a:r>
           </a:p>
         </p:txBody>
@@ -7098,7 +8121,7 @@
               </a:spcBef>
             </a:pPr>
             <a:r>
-              <a:rPr lang="en-US" sz="2404">
+              <a:rPr lang="en-US" sz="1000">
                 <a:solidFill>
                   <a:srgbClr val="F2F6FC"/>
                 </a:solidFill>
@@ -7107,7 +8130,7 @@
                 <a:cs typeface="Open Sans"/>
                 <a:sym typeface="Open Sans"/>
               </a:rPr>
-              <a:t>T</a:t>
+              <a:t>Human-in-the-loop approval required for every action; confidence scoring + graceful degradation</a:t>
             </a:r>
             <a:r>
               <a:rPr lang="en-US" sz="2404">
@@ -7119,7 +8142,7 @@
                 <a:cs typeface="Open Sans"/>
                 <a:sym typeface="Open Sans"/>
               </a:rPr>
-              <a:t>e</a:t>
+              <a:t/>
             </a:r>
             <a:r>
               <a:rPr lang="en-US" sz="2404">
@@ -7131,7 +8154,7 @@
                 <a:cs typeface="Open Sans"/>
                 <a:sym typeface="Open Sans"/>
               </a:rPr>
-              <a:t>xt</a:t>
+              <a:t/>
             </a:r>
           </a:p>
         </p:txBody>
@@ -7166,7 +8189,7 @@
               </a:spcBef>
             </a:pPr>
             <a:r>
-              <a:rPr lang="en-US" b="true" sz="2404">
+              <a:rPr lang="en-US" b="true" sz="1000">
                 <a:solidFill>
                   <a:srgbClr val="FFFEFE"/>
                 </a:solidFill>
@@ -7175,7 +8198,7 @@
                 <a:cs typeface="Open Sans Bold"/>
                 <a:sym typeface="Open Sans Bold"/>
               </a:rPr>
-              <a:t>T</a:t>
+              <a:t>Seed 20-30 first-party agents, ISV partnerships, $5M developer grants program</a:t>
             </a:r>
             <a:r>
               <a:rPr lang="en-US" b="true" sz="2404">
@@ -7187,7 +8210,7 @@
                 <a:cs typeface="Open Sans Bold"/>
                 <a:sym typeface="Open Sans Bold"/>
               </a:rPr>
-              <a:t>ext</a:t>
+              <a:t/>
             </a:r>
           </a:p>
         </p:txBody>
@@ -7629,6 +8652,514 @@
                 <a:sym typeface="Lato"/>
               </a:rPr>
               <a:t> | Executive Summary</a:t>
+            </a:r>
+          </a:p>
+        </p:txBody>
+      </p:sp>
+      <p:sp>
+        <p:nvSpPr>
+          <p:cNvPr id="8" name="TextBox 7"/>
+          <p:cNvSpPr txBox="1"/>
+          <p:nvPr/>
+        </p:nvSpPr>
+        <p:spPr>
+          <a:xfrm>
+            <a:off x="1097280" y="1463040"/>
+            <a:ext cx="7772400" cy="7772400"/>
+          </a:xfrm>
+          <a:prstGeom prst="rect">
+            <a:avLst/>
+          </a:prstGeom>
+          <a:noFill/>
+        </p:spPr>
+        <p:txBody>
+          <a:bodyPr wrap="square">
+            <a:spAutoFit/>
+          </a:bodyPr>
+          <a:lstStyle/>
+          <a:p>
+            <a:pPr algn="l">
+              <a:spcAft>
+                <a:spcPts val="200"/>
+              </a:spcAft>
+              <a:defRPr sz="1600" b="1">
+                <a:solidFill>
+                  <a:srgbClr val="333333"/>
+                </a:solidFill>
+                <a:latin typeface="TT Commons Pro"/>
+              </a:defRPr>
+            </a:pPr>
+            <a:r>
+              <a:t>Investment &amp; Costs</a:t>
+            </a:r>
+          </a:p>
+          <a:p>
+            <a:pPr algn="l">
+              <a:spcAft>
+                <a:spcPts val="200"/>
+              </a:spcAft>
+              <a:defRPr sz="600" b="0">
+                <a:solidFill>
+                  <a:srgbClr val="333333"/>
+                </a:solidFill>
+                <a:latin typeface="TT Commons Pro"/>
+              </a:defRPr>
+            </a:pPr>
+          </a:p>
+          <a:p>
+            <a:pPr algn="l">
+              <a:spcAft>
+                <a:spcPts val="200"/>
+              </a:spcAft>
+              <a:defRPr sz="1200" b="1">
+                <a:solidFill>
+                  <a:srgbClr val="333333"/>
+                </a:solidFill>
+                <a:latin typeface="TT Commons Pro"/>
+              </a:defRPr>
+            </a:pPr>
+            <a:r>
+              <a:t>R&amp;D Investment (from $7.98B annual budget)</a:t>
+            </a:r>
+          </a:p>
+          <a:p>
+            <a:pPr algn="l">
+              <a:spcAft>
+                <a:spcPts val="200"/>
+              </a:spcAft>
+              <a:defRPr sz="1100" b="0">
+                <a:solidFill>
+                  <a:srgbClr val="333333"/>
+                </a:solidFill>
+                <a:latin typeface="TT Commons Pro"/>
+              </a:defRPr>
+            </a:pPr>
+            <a:r>
+              <a:t>Solution 1 (Orchestrator): $45M over 18 months</a:t>
+            </a:r>
+          </a:p>
+          <a:p>
+            <a:pPr algn="l">
+              <a:spcAft>
+                <a:spcPts val="200"/>
+              </a:spcAft>
+              <a:defRPr sz="1100" b="0">
+                <a:solidFill>
+                  <a:srgbClr val="333333"/>
+                </a:solidFill>
+                <a:latin typeface="TT Commons Pro"/>
+              </a:defRPr>
+            </a:pPr>
+            <a:r>
+              <a:t>Solution 2 (VIBE): $30M over 12 months</a:t>
+            </a:r>
+          </a:p>
+          <a:p>
+            <a:pPr algn="l">
+              <a:spcAft>
+                <a:spcPts val="200"/>
+              </a:spcAft>
+              <a:defRPr sz="1100" b="0">
+                <a:solidFill>
+                  <a:srgbClr val="333333"/>
+                </a:solidFill>
+                <a:latin typeface="TT Commons Pro"/>
+              </a:defRPr>
+            </a:pPr>
+            <a:r>
+              <a:t>Solution 3 (Marketplace): $25M over 24 months</a:t>
+            </a:r>
+          </a:p>
+          <a:p>
+            <a:pPr algn="l">
+              <a:spcAft>
+                <a:spcPts val="200"/>
+              </a:spcAft>
+              <a:defRPr sz="1100" b="0">
+                <a:solidFill>
+                  <a:srgbClr val="333333"/>
+                </a:solidFill>
+                <a:latin typeface="TT Commons Pro"/>
+              </a:defRPr>
+            </a:pPr>
+            <a:r>
+              <a:t>Total: $100M (1.25% of annual R&amp;D budget)</a:t>
+            </a:r>
+          </a:p>
+          <a:p>
+            <a:pPr algn="l">
+              <a:spcAft>
+                <a:spcPts val="200"/>
+              </a:spcAft>
+              <a:defRPr sz="600" b="0">
+                <a:solidFill>
+                  <a:srgbClr val="333333"/>
+                </a:solidFill>
+                <a:latin typeface="TT Commons Pro"/>
+              </a:defRPr>
+            </a:pPr>
+          </a:p>
+          <a:p>
+            <a:pPr algn="l">
+              <a:spcAft>
+                <a:spcPts val="200"/>
+              </a:spcAft>
+              <a:defRPr sz="1200" b="1">
+                <a:solidFill>
+                  <a:srgbClr val="333333"/>
+                </a:solidFill>
+                <a:latin typeface="TT Commons Pro"/>
+              </a:defRPr>
+            </a:pPr>
+            <a:r>
+              <a:t>Ongoing Operating Costs (Annual)</a:t>
+            </a:r>
+          </a:p>
+          <a:p>
+            <a:pPr algn="l">
+              <a:spcAft>
+                <a:spcPts val="200"/>
+              </a:spcAft>
+              <a:defRPr sz="1100" b="0">
+                <a:solidFill>
+                  <a:srgbClr val="333333"/>
+                </a:solidFill>
+                <a:latin typeface="TT Commons Pro"/>
+              </a:defRPr>
+            </a:pPr>
+            <a:r>
+              <a:t>Cloud infrastructure scaling: $15M/year</a:t>
+            </a:r>
+          </a:p>
+          <a:p>
+            <a:pPr algn="l">
+              <a:spcAft>
+                <a:spcPts val="200"/>
+              </a:spcAft>
+              <a:defRPr sz="1100" b="0">
+                <a:solidFill>
+                  <a:srgbClr val="333333"/>
+                </a:solidFill>
+                <a:latin typeface="TT Commons Pro"/>
+              </a:defRPr>
+            </a:pPr>
+            <a:r>
+              <a:t>Splunk observability licensing: $8M/year</a:t>
+            </a:r>
+          </a:p>
+          <a:p>
+            <a:pPr algn="l">
+              <a:spcAft>
+                <a:spcPts val="200"/>
+              </a:spcAft>
+              <a:defRPr sz="1100" b="0">
+                <a:solidFill>
+                  <a:srgbClr val="333333"/>
+                </a:solidFill>
+                <a:latin typeface="TT Commons Pro"/>
+              </a:defRPr>
+            </a:pPr>
+            <a:r>
+              <a:t>Developer relations &amp; grants: $5M/year</a:t>
+            </a:r>
+          </a:p>
+          <a:p>
+            <a:pPr algn="l">
+              <a:spcAft>
+                <a:spcPts val="200"/>
+              </a:spcAft>
+              <a:defRPr sz="1100" b="0">
+                <a:solidFill>
+                  <a:srgbClr val="333333"/>
+                </a:solidFill>
+                <a:latin typeface="TT Commons Pro"/>
+              </a:defRPr>
+            </a:pPr>
+            <a:r>
+              <a:t>Security certification team: $4M/year</a:t>
+            </a:r>
+          </a:p>
+          <a:p>
+            <a:pPr algn="l">
+              <a:spcAft>
+                <a:spcPts val="200"/>
+              </a:spcAft>
+              <a:defRPr sz="1100" b="0">
+                <a:solidFill>
+                  <a:srgbClr val="333333"/>
+                </a:solidFill>
+                <a:latin typeface="TT Commons Pro"/>
+              </a:defRPr>
+            </a:pPr>
+            <a:r>
+              <a:t>Total ongoing: $32M/year</a:t>
+            </a:r>
+          </a:p>
+        </p:txBody>
+      </p:sp>
+      <p:sp>
+        <p:nvSpPr>
+          <p:cNvPr id="9" name="TextBox 8"/>
+          <p:cNvSpPr txBox="1"/>
+          <p:nvPr/>
+        </p:nvSpPr>
+        <p:spPr>
+          <a:xfrm>
+            <a:off x="9601200" y="1463040"/>
+            <a:ext cx="7772400" cy="7772400"/>
+          </a:xfrm>
+          <a:prstGeom prst="rect">
+            <a:avLst/>
+          </a:prstGeom>
+          <a:noFill/>
+        </p:spPr>
+        <p:txBody>
+          <a:bodyPr wrap="square">
+            <a:spAutoFit/>
+          </a:bodyPr>
+          <a:lstStyle/>
+          <a:p>
+            <a:pPr algn="l">
+              <a:spcAft>
+                <a:spcPts val="200"/>
+              </a:spcAft>
+              <a:defRPr sz="1600" b="1">
+                <a:solidFill>
+                  <a:srgbClr val="204F69"/>
+                </a:solidFill>
+                <a:latin typeface="TT Commons Pro"/>
+              </a:defRPr>
+            </a:pPr>
+            <a:r>
+              <a:t>Revenue Projections</a:t>
+            </a:r>
+          </a:p>
+          <a:p>
+            <a:pPr algn="l">
+              <a:spcAft>
+                <a:spcPts val="200"/>
+              </a:spcAft>
+              <a:defRPr sz="600" b="0">
+                <a:solidFill>
+                  <a:srgbClr val="204F69"/>
+                </a:solidFill>
+                <a:latin typeface="TT Commons Pro"/>
+              </a:defRPr>
+            </a:pPr>
+          </a:p>
+          <a:p>
+            <a:pPr algn="l">
+              <a:spcAft>
+                <a:spcPts val="200"/>
+              </a:spcAft>
+              <a:defRPr sz="1200" b="1">
+                <a:solidFill>
+                  <a:srgbClr val="204F69"/>
+                </a:solidFill>
+                <a:latin typeface="TT Commons Pro"/>
+              </a:defRPr>
+            </a:pPr>
+            <a:r>
+              <a:t>FY2027 (Year 1)</a:t>
+            </a:r>
+          </a:p>
+          <a:p>
+            <a:pPr algn="l">
+              <a:spcAft>
+                <a:spcPts val="200"/>
+              </a:spcAft>
+              <a:defRPr sz="1100" b="0">
+                <a:solidFill>
+                  <a:srgbClr val="204F69"/>
+                </a:solidFill>
+                <a:latin typeface="TT Commons Pro"/>
+              </a:defRPr>
+            </a:pPr>
+            <a:r>
+              <a:t>Incremental collaboration ARR: +$400M</a:t>
+            </a:r>
+          </a:p>
+          <a:p>
+            <a:pPr algn="l">
+              <a:spcAft>
+                <a:spcPts val="200"/>
+              </a:spcAft>
+              <a:defRPr sz="1100" b="0">
+                <a:solidFill>
+                  <a:srgbClr val="204F69"/>
+                </a:solidFill>
+                <a:latin typeface="TT Commons Pro"/>
+              </a:defRPr>
+            </a:pPr>
+            <a:r>
+              <a:t>Marketplace commission: $5M</a:t>
+            </a:r>
+          </a:p>
+          <a:p>
+            <a:pPr algn="l">
+              <a:spcAft>
+                <a:spcPts val="200"/>
+              </a:spcAft>
+              <a:defRPr sz="400" b="0">
+                <a:solidFill>
+                  <a:srgbClr val="204F69"/>
+                </a:solidFill>
+                <a:latin typeface="TT Commons Pro"/>
+              </a:defRPr>
+            </a:pPr>
+          </a:p>
+          <a:p>
+            <a:pPr algn="l">
+              <a:spcAft>
+                <a:spcPts val="200"/>
+              </a:spcAft>
+              <a:defRPr sz="1200" b="1">
+                <a:solidFill>
+                  <a:srgbClr val="204F69"/>
+                </a:solidFill>
+                <a:latin typeface="TT Commons Pro"/>
+              </a:defRPr>
+            </a:pPr>
+            <a:r>
+              <a:t>FY2028 (Year 2)</a:t>
+            </a:r>
+          </a:p>
+          <a:p>
+            <a:pPr algn="l">
+              <a:spcAft>
+                <a:spcPts val="200"/>
+              </a:spcAft>
+              <a:defRPr sz="1100" b="0">
+                <a:solidFill>
+                  <a:srgbClr val="204F69"/>
+                </a:solidFill>
+                <a:latin typeface="TT Commons Pro"/>
+              </a:defRPr>
+            </a:pPr>
+            <a:r>
+              <a:t>Incremental collaboration ARR: +$1.1B</a:t>
+            </a:r>
+          </a:p>
+          <a:p>
+            <a:pPr algn="l">
+              <a:spcAft>
+                <a:spcPts val="200"/>
+              </a:spcAft>
+              <a:defRPr sz="1100" b="0">
+                <a:solidFill>
+                  <a:srgbClr val="204F69"/>
+                </a:solidFill>
+                <a:latin typeface="TT Commons Pro"/>
+              </a:defRPr>
+            </a:pPr>
+            <a:r>
+              <a:t>Marketplace commission: $20M</a:t>
+            </a:r>
+          </a:p>
+          <a:p>
+            <a:pPr algn="l">
+              <a:spcAft>
+                <a:spcPts val="200"/>
+              </a:spcAft>
+              <a:defRPr sz="400" b="0">
+                <a:solidFill>
+                  <a:srgbClr val="204F69"/>
+                </a:solidFill>
+                <a:latin typeface="TT Commons Pro"/>
+              </a:defRPr>
+            </a:pPr>
+          </a:p>
+          <a:p>
+            <a:pPr algn="l">
+              <a:spcAft>
+                <a:spcPts val="200"/>
+              </a:spcAft>
+              <a:defRPr sz="1200" b="1">
+                <a:solidFill>
+                  <a:srgbClr val="204F69"/>
+                </a:solidFill>
+                <a:latin typeface="TT Commons Pro"/>
+              </a:defRPr>
+            </a:pPr>
+            <a:r>
+              <a:t>FY2029 (Year 3)</a:t>
+            </a:r>
+          </a:p>
+          <a:p>
+            <a:pPr algn="l">
+              <a:spcAft>
+                <a:spcPts val="200"/>
+              </a:spcAft>
+              <a:defRPr sz="1100" b="0">
+                <a:solidFill>
+                  <a:srgbClr val="204F69"/>
+                </a:solidFill>
+                <a:latin typeface="TT Commons Pro"/>
+              </a:defRPr>
+            </a:pPr>
+            <a:r>
+              <a:t>Incremental collaboration ARR: +$2.1B</a:t>
+            </a:r>
+          </a:p>
+          <a:p>
+            <a:pPr algn="l">
+              <a:spcAft>
+                <a:spcPts val="200"/>
+              </a:spcAft>
+              <a:defRPr sz="1100" b="0">
+                <a:solidFill>
+                  <a:srgbClr val="204F69"/>
+                </a:solidFill>
+                <a:latin typeface="TT Commons Pro"/>
+              </a:defRPr>
+            </a:pPr>
+            <a:r>
+              <a:t>Marketplace commission: $50M</a:t>
+            </a:r>
+          </a:p>
+          <a:p>
+            <a:pPr algn="l">
+              <a:spcAft>
+                <a:spcPts val="200"/>
+              </a:spcAft>
+              <a:defRPr sz="400" b="0">
+                <a:solidFill>
+                  <a:srgbClr val="204F69"/>
+                </a:solidFill>
+                <a:latin typeface="TT Commons Pro"/>
+              </a:defRPr>
+            </a:pPr>
+          </a:p>
+          <a:p>
+            <a:pPr algn="l">
+              <a:spcAft>
+                <a:spcPts val="200"/>
+              </a:spcAft>
+              <a:defRPr sz="1200" b="1">
+                <a:solidFill>
+                  <a:srgbClr val="204F69"/>
+                </a:solidFill>
+                <a:latin typeface="TT Commons Pro"/>
+              </a:defRPr>
+            </a:pPr>
+            <a:r>
+              <a:t>ROI: 21x return on $100M investment by FY2029</a:t>
+            </a:r>
+          </a:p>
+          <a:p>
+            <a:pPr algn="l">
+              <a:spcAft>
+                <a:spcPts val="200"/>
+              </a:spcAft>
+              <a:defRPr sz="1100" b="0">
+                <a:solidFill>
+                  <a:srgbClr val="204F69"/>
+                </a:solidFill>
+                <a:latin typeface="TT Commons Pro"/>
+              </a:defRPr>
+            </a:pPr>
+            <a:r>
+              <a:t>Productivity savings: $4,200 per knowledge worker/year</a:t>
             </a:r>
           </a:p>
         </p:txBody>
@@ -8591,7 +10122,7 @@
                 <a:cs typeface="Open Sans Bold"/>
                 <a:sym typeface="Open Sans Bold"/>
               </a:rPr>
-              <a:t>S</a:t>
+              <a:t>Solution #2: VIBE</a:t>
             </a:r>
             <a:r>
               <a:rPr lang="en-US" b="true" sz="2700">
@@ -8603,7 +10134,7 @@
                 <a:cs typeface="Open Sans Bold"/>
                 <a:sym typeface="Open Sans Bold"/>
               </a:rPr>
-              <a:t>olution #2</a:t>
+              <a:t/>
             </a:r>
           </a:p>
         </p:txBody>
@@ -8679,7 +10210,7 @@
                 <a:cs typeface="Open Sans Bold"/>
                 <a:sym typeface="Open Sans Bold"/>
               </a:rPr>
-              <a:t>Solution #1</a:t>
+              <a:t>Solution #1: AI Orchestrator</a:t>
             </a:r>
           </a:p>
         </p:txBody>
@@ -8723,7 +10254,7 @@
                 <a:cs typeface="Open Sans Bold"/>
                 <a:sym typeface="Open Sans Bold"/>
               </a:rPr>
-              <a:t>Soluti</a:t>
+              <a:t>Solution #3: Marketplace</a:t>
             </a:r>
             <a:r>
               <a:rPr lang="en-US" b="true" sz="2700">
@@ -8735,7 +10266,7 @@
                 <a:cs typeface="Open Sans Bold"/>
                 <a:sym typeface="Open Sans Bold"/>
               </a:rPr>
-              <a:t>on #2</a:t>
+              <a:t/>
             </a:r>
           </a:p>
         </p:txBody>
@@ -8768,30 +10299,82 @@
               <a:spcBef>
                 <a:spcPct val="0"/>
               </a:spcBef>
-            </a:pPr>
-            <a:r>
-              <a:rPr lang="en-US" sz="3000">
+              <a:spcAft>
+                <a:spcPts val="400"/>
+              </a:spcAft>
+              <a:defRPr sz="1000">
                 <a:solidFill>
                   <a:srgbClr val="000000"/>
                 </a:solidFill>
-                <a:latin typeface="Open Sans"/>
-                <a:ea typeface="Open Sans"/>
-                <a:cs typeface="Open Sans"/>
-                <a:sym typeface="Open Sans"/>
-              </a:rPr>
-              <a:t>T</a:t>
-            </a:r>
-            <a:r>
-              <a:rPr lang="en-US" sz="3000">
+                <a:latin typeface="TT Commons Pro"/>
+              </a:defRPr>
+            </a:pPr>
+            <a:r>
+              <a:t>95%+ noise reduction</a:t>
+            </a:r>
+          </a:p>
+          <a:p>
+            <a:pPr>
+              <a:spcAft>
+                <a:spcPts val="400"/>
+              </a:spcAft>
+              <a:defRPr sz="1000">
                 <a:solidFill>
                   <a:srgbClr val="000000"/>
                 </a:solidFill>
-                <a:latin typeface="Open Sans"/>
-                <a:ea typeface="Open Sans"/>
-                <a:cs typeface="Open Sans"/>
-                <a:sym typeface="Open Sans"/>
-              </a:rPr>
-              <a:t>ext</a:t>
+                <a:latin typeface="TT Commons Pro"/>
+              </a:defRPr>
+            </a:pPr>
+            <a:r>
+              <a:t>98% ASR accuracy</a:t>
+            </a:r>
+          </a:p>
+          <a:p>
+            <a:pPr>
+              <a:spcAft>
+                <a:spcPts val="400"/>
+              </a:spcAft>
+              <a:defRPr sz="1000">
+                <a:solidFill>
+                  <a:srgbClr val="000000"/>
+                </a:solidFill>
+                <a:latin typeface="TT Commons Pro"/>
+              </a:defRPr>
+            </a:pPr>
+            <a:r>
+              <a:t>&lt;1s translation latency</a:t>
+            </a:r>
+          </a:p>
+          <a:p>
+            <a:pPr>
+              <a:spcAft>
+                <a:spcPts val="400"/>
+              </a:spcAft>
+              <a:defRPr sz="1000">
+                <a:solidFill>
+                  <a:srgbClr val="000000"/>
+                </a:solidFill>
+                <a:latin typeface="TT Commons Pro"/>
+              </a:defRPr>
+            </a:pPr>
+            <a:r>
+              <a:t>4.5/5 TTS naturalness</a:t>
+            </a:r>
+          </a:p>
+          <a:p>
+            <a:pPr>
+              <a:spcAft>
+                <a:spcPts val="400"/>
+              </a:spcAft>
+              <a:defRPr sz="1000">
+                <a:solidFill>
+                  <a:srgbClr val="000000"/>
+                </a:solidFill>
+                <a:latin typeface="TT Commons Pro"/>
+              </a:defRPr>
+            </a:pPr>
+            <a:r>
+              <a:t>+40% participation increase</a:t>
             </a:r>
           </a:p>
         </p:txBody>
@@ -8824,30 +10407,82 @@
               <a:spcBef>
                 <a:spcPct val="0"/>
               </a:spcBef>
-            </a:pPr>
-            <a:r>
-              <a:rPr lang="en-US" sz="2832">
+              <a:spcAft>
+                <a:spcPts val="400"/>
+              </a:spcAft>
+              <a:defRPr sz="1000">
                 <a:solidFill>
                   <a:srgbClr val="000000"/>
                 </a:solidFill>
                 <a:latin typeface="TT Commons Pro"/>
-                <a:ea typeface="TT Commons Pro"/>
-                <a:cs typeface="TT Commons Pro"/>
-                <a:sym typeface="TT Commons Pro"/>
-              </a:rPr>
-              <a:t>T</a:t>
-            </a:r>
-            <a:r>
-              <a:rPr lang="en-US" sz="2832">
+              </a:defRPr>
+            </a:pPr>
+            <a:r>
+              <a:t>500+ certified agents Yr 1</a:t>
+            </a:r>
+          </a:p>
+          <a:p>
+            <a:pPr>
+              <a:spcAft>
+                <a:spcPts val="400"/>
+              </a:spcAft>
+              <a:defRPr sz="1000">
                 <a:solidFill>
                   <a:srgbClr val="000000"/>
                 </a:solidFill>
                 <a:latin typeface="TT Commons Pro"/>
-                <a:ea typeface="TT Commons Pro"/>
-                <a:cs typeface="TT Commons Pro"/>
-                <a:sym typeface="TT Commons Pro"/>
-              </a:rPr>
-              <a:t>ext</a:t>
+              </a:defRPr>
+            </a:pPr>
+            <a:r>
+              <a:t>$150M GMV by FY2028</a:t>
+            </a:r>
+          </a:p>
+          <a:p>
+            <a:pPr>
+              <a:spcAft>
+                <a:spcPts val="400"/>
+              </a:spcAft>
+              <a:defRPr sz="1000">
+                <a:solidFill>
+                  <a:srgbClr val="000000"/>
+                </a:solidFill>
+                <a:latin typeface="TT Commons Pro"/>
+              </a:defRPr>
+            </a:pPr>
+            <a:r>
+              <a:t>3x developer growth</a:t>
+            </a:r>
+          </a:p>
+          <a:p>
+            <a:pPr>
+              <a:spcAft>
+                <a:spcPts val="400"/>
+              </a:spcAft>
+              <a:defRPr sz="1000">
+                <a:solidFill>
+                  <a:srgbClr val="000000"/>
+                </a:solidFill>
+                <a:latin typeface="TT Commons Pro"/>
+              </a:defRPr>
+            </a:pPr>
+            <a:r>
+              <a:t>85% enterprise renewal</a:t>
+            </a:r>
+          </a:p>
+          <a:p>
+            <a:pPr>
+              <a:spcAft>
+                <a:spcPts val="400"/>
+              </a:spcAft>
+              <a:defRPr sz="1000">
+                <a:solidFill>
+                  <a:srgbClr val="000000"/>
+                </a:solidFill>
+                <a:latin typeface="TT Commons Pro"/>
+              </a:defRPr>
+            </a:pPr>
+            <a:r>
+              <a:t>$50M commission by FY2029</a:t>
             </a:r>
           </a:p>
         </p:txBody>
@@ -8880,18 +10515,82 @@
               <a:spcBef>
                 <a:spcPct val="0"/>
               </a:spcBef>
-            </a:pPr>
-            <a:r>
-              <a:rPr lang="en-US" sz="3200">
+              <a:spcAft>
+                <a:spcPts val="400"/>
+              </a:spcAft>
+              <a:defRPr sz="1000">
                 <a:solidFill>
                   <a:srgbClr val="000000"/>
                 </a:solidFill>
                 <a:latin typeface="TT Commons Pro"/>
-                <a:ea typeface="TT Commons Pro"/>
-                <a:cs typeface="TT Commons Pro"/>
-                <a:sym typeface="TT Commons Pro"/>
-              </a:rPr>
-              <a:t>Text</a:t>
+              </a:defRPr>
+            </a:pPr>
+            <a:r>
+              <a:t>25% meeting-to-action rate</a:t>
+            </a:r>
+          </a:p>
+          <a:p>
+            <a:pPr>
+              <a:spcAft>
+                <a:spcPts val="400"/>
+              </a:spcAft>
+              <a:defRPr sz="1000">
+                <a:solidFill>
+                  <a:srgbClr val="000000"/>
+                </a:solidFill>
+                <a:latin typeface="TT Commons Pro"/>
+              </a:defRPr>
+            </a:pPr>
+            <a:r>
+              <a:t>15 min saved per meeting</a:t>
+            </a:r>
+          </a:p>
+          <a:p>
+            <a:pPr>
+              <a:spcAft>
+                <a:spcPts val="400"/>
+              </a:spcAft>
+              <a:defRPr sz="1000">
+                <a:solidFill>
+                  <a:srgbClr val="000000"/>
+                </a:solidFill>
+                <a:latin typeface="TT Commons Pro"/>
+              </a:defRPr>
+            </a:pPr>
+            <a:r>
+              <a:t>40% workflow automation</a:t>
+            </a:r>
+          </a:p>
+          <a:p>
+            <a:pPr>
+              <a:spcAft>
+                <a:spcPts val="400"/>
+              </a:spcAft>
+              <a:defRPr sz="1000">
+                <a:solidFill>
+                  <a:srgbClr val="000000"/>
+                </a:solidFill>
+                <a:latin typeface="TT Commons Pro"/>
+              </a:defRPr>
+            </a:pPr>
+            <a:r>
+              <a:t>85% task accuracy</a:t>
+            </a:r>
+          </a:p>
+          <a:p>
+            <a:pPr>
+              <a:spcAft>
+                <a:spcPts val="400"/>
+              </a:spcAft>
+              <a:defRPr sz="1000">
+                <a:solidFill>
+                  <a:srgbClr val="000000"/>
+                </a:solidFill>
+                <a:latin typeface="TT Commons Pro"/>
+              </a:defRPr>
+            </a:pPr>
+            <a:r>
+              <a:t>90%+ Q&amp;A resolution</a:t>
             </a:r>
           </a:p>
         </p:txBody>
@@ -9183,6 +10882,222 @@
                 <a:sym typeface="Lato Bold"/>
               </a:rPr>
               <a:t>Executive Summary</a:t>
+            </a:r>
+          </a:p>
+        </p:txBody>
+      </p:sp>
+      <p:sp>
+        <p:nvSpPr>
+          <p:cNvPr id="8" name="TextBox 7"/>
+          <p:cNvSpPr txBox="1"/>
+          <p:nvPr/>
+        </p:nvSpPr>
+        <p:spPr>
+          <a:xfrm>
+            <a:off x="1097280" y="1463040"/>
+            <a:ext cx="16459200" cy="7772400"/>
+          </a:xfrm>
+          <a:prstGeom prst="rect">
+            <a:avLst/>
+          </a:prstGeom>
+          <a:noFill/>
+        </p:spPr>
+        <p:txBody>
+          <a:bodyPr wrap="square">
+            <a:spAutoFit/>
+          </a:bodyPr>
+          <a:lstStyle/>
+          <a:p>
+            <a:pPr algn="l">
+              <a:spcAft>
+                <a:spcPts val="200"/>
+              </a:spcAft>
+              <a:defRPr sz="600" b="0">
+                <a:solidFill>
+                  <a:srgbClr val="333333"/>
+                </a:solidFill>
+                <a:latin typeface="TT Commons Pro"/>
+              </a:defRPr>
+            </a:pPr>
+          </a:p>
+          <a:p>
+            <a:pPr algn="l">
+              <a:spcAft>
+                <a:spcPts val="200"/>
+              </a:spcAft>
+              <a:defRPr sz="1200" b="0">
+                <a:solidFill>
+                  <a:srgbClr val="333333"/>
+                </a:solidFill>
+                <a:latin typeface="TT Commons Pro"/>
+              </a:defRPr>
+            </a:pPr>
+            <a:r>
+              <a:t>Cisco Webex faces three critical gaps preventing it from competing against Microsoft Teams and Zoom in the next phase of hybrid work. We propose three integrated, AI-powered solutions that leverage Cisco's unique strengths.</a:t>
+            </a:r>
+          </a:p>
+          <a:p>
+            <a:pPr algn="l">
+              <a:spcAft>
+                <a:spcPts val="200"/>
+              </a:spcAft>
+              <a:defRPr sz="600" b="0">
+                <a:solidFill>
+                  <a:srgbClr val="333333"/>
+                </a:solidFill>
+                <a:latin typeface="TT Commons Pro"/>
+              </a:defRPr>
+            </a:pPr>
+          </a:p>
+          <a:p>
+            <a:pPr algn="l">
+              <a:spcAft>
+                <a:spcPts val="200"/>
+              </a:spcAft>
+              <a:defRPr sz="1300" b="1">
+                <a:solidFill>
+                  <a:srgbClr val="333333"/>
+                </a:solidFill>
+                <a:latin typeface="TT Commons Pro"/>
+              </a:defRPr>
+            </a:pPr>
+            <a:r>
+              <a:t>Problem 1: Passive AI</a:t>
+            </a:r>
+          </a:p>
+          <a:p>
+            <a:pPr algn="l">
+              <a:spcAft>
+                <a:spcPts val="200"/>
+              </a:spcAft>
+              <a:defRPr sz="1100" b="0">
+                <a:solidFill>
+                  <a:srgbClr val="333333"/>
+                </a:solidFill>
+                <a:latin typeface="TT Commons Pro"/>
+              </a:defRPr>
+            </a:pPr>
+            <a:r>
+              <a:t>Webex AI summarizes but cannot prepare, execute, or follow up. Solution: AI Meeting Prep &amp; Workflow Orchestrator with Prepare-Perceive-Reason-Act-Follow-Up architecture. Impact: 25% meeting-to-action rate, 15 min saved per meeting.</a:t>
+            </a:r>
+          </a:p>
+          <a:p>
+            <a:pPr algn="l">
+              <a:spcAft>
+                <a:spcPts val="200"/>
+              </a:spcAft>
+              <a:defRPr sz="400" b="0">
+                <a:solidFill>
+                  <a:srgbClr val="333333"/>
+                </a:solidFill>
+                <a:latin typeface="TT Commons Pro"/>
+              </a:defRPr>
+            </a:pPr>
+          </a:p>
+          <a:p>
+            <a:pPr algn="l">
+              <a:spcAft>
+                <a:spcPts val="200"/>
+              </a:spcAft>
+              <a:defRPr sz="1300" b="1">
+                <a:solidFill>
+                  <a:srgbClr val="333333"/>
+                </a:solidFill>
+                <a:latin typeface="TT Commons Pro"/>
+              </a:defRPr>
+            </a:pPr>
+            <a:r>
+              <a:t>Problem 2: Participation Exclusion</a:t>
+            </a:r>
+          </a:p>
+          <a:p>
+            <a:pPr algn="l">
+              <a:spcAft>
+                <a:spcPts val="200"/>
+              </a:spcAft>
+              <a:defRPr sz="1100" b="0">
+                <a:solidFill>
+                  <a:srgbClr val="333333"/>
+                </a:solidFill>
+                <a:latin typeface="TT Commons Pro"/>
+              </a:defRPr>
+            </a:pPr>
+            <a:r>
+              <a:t>Non-native speakers and non-technical users are systematically excluded. Solution: VIBE - Voice &amp; Language Intelligence Layer with voice boost, live translation (100+ languages), type-to-speak, and jargon simplification. Impact: +40% non-native speaker participation.</a:t>
+            </a:r>
+          </a:p>
+          <a:p>
+            <a:pPr algn="l">
+              <a:spcAft>
+                <a:spcPts val="200"/>
+              </a:spcAft>
+              <a:defRPr sz="400" b="0">
+                <a:solidFill>
+                  <a:srgbClr val="333333"/>
+                </a:solidFill>
+                <a:latin typeface="TT Commons Pro"/>
+              </a:defRPr>
+            </a:pPr>
+          </a:p>
+          <a:p>
+            <a:pPr algn="l">
+              <a:spcAft>
+                <a:spcPts val="200"/>
+              </a:spcAft>
+              <a:defRPr sz="1300" b="1">
+                <a:solidFill>
+                  <a:srgbClr val="333333"/>
+                </a:solidFill>
+                <a:latin typeface="TT Commons Pro"/>
+              </a:defRPr>
+            </a:pPr>
+            <a:r>
+              <a:t>Problem 3: Weak Developer Ecosystem</a:t>
+            </a:r>
+          </a:p>
+          <a:p>
+            <a:pPr algn="l">
+              <a:spcAft>
+                <a:spcPts val="200"/>
+              </a:spcAft>
+              <a:defRPr sz="1100" b="0">
+                <a:solidFill>
+                  <a:srgbClr val="333333"/>
+                </a:solidFill>
+                <a:latin typeface="TT Commons Pro"/>
+              </a:defRPr>
+            </a:pPr>
+            <a:r>
+              <a:t>Teams has 2,000+, Zoom has 2,500+ integrations. No AI agent marketplace exists. Solution: Secure AI Agent Marketplace with Cisco certification, Splunk monitoring, and enterprise governance. Impact: 500+ certified agents Year 1, $50M annual commission by FY2029.</a:t>
+            </a:r>
+          </a:p>
+          <a:p>
+            <a:pPr algn="l">
+              <a:spcAft>
+                <a:spcPts val="200"/>
+              </a:spcAft>
+              <a:defRPr sz="600" b="0">
+                <a:solidFill>
+                  <a:srgbClr val="333333"/>
+                </a:solidFill>
+                <a:latin typeface="TT Commons Pro"/>
+              </a:defRPr>
+            </a:pPr>
+          </a:p>
+          <a:p>
+            <a:pPr algn="l">
+              <a:spcAft>
+                <a:spcPts val="200"/>
+              </a:spcAft>
+              <a:defRPr sz="1200" b="1">
+                <a:solidFill>
+                  <a:srgbClr val="333333"/>
+                </a:solidFill>
+                <a:latin typeface="TT Commons Pro"/>
+              </a:defRPr>
+            </a:pPr>
+            <a:r>
+              <a:t>Combined Impact: +$2.1B incremental ARR by FY2029  |  $4,200 productivity savings per worker/year  |  85% enterprise renewal rate</a:t>
             </a:r>
           </a:p>
         </p:txBody>
@@ -9916,7 +11831,7 @@
                 <a:cs typeface="TT Commons Pro Bold"/>
                 <a:sym typeface="TT Commons Pro Bold"/>
               </a:rPr>
-              <a:t>Appendix A:  </a:t>
+              <a:t>Appendix A: Detailed Flowcharts (see attached PDF document)</a:t>
             </a:r>
           </a:p>
           <a:p>
@@ -9938,7 +11853,7 @@
                 <a:cs typeface="TT Commons Pro Bold"/>
                 <a:sym typeface="TT Commons Pro Bold"/>
               </a:rPr>
-              <a:t>Appendix B:  </a:t>
+              <a:t>Appendix B: Technical Feasibility &amp; Scalability Assessment</a:t>
             </a:r>
           </a:p>
           <a:p>
@@ -9960,7 +11875,197 @@
                 <a:cs typeface="TT Commons Pro Bold"/>
                 <a:sym typeface="TT Commons Pro Bold"/>
               </a:rPr>
-              <a:t>Appendix c: </a:t>
+              <a:t>Appendix C: References &amp; Sources</a:t>
+            </a:r>
+          </a:p>
+        </p:txBody>
+      </p:sp>
+      <p:sp>
+        <p:nvSpPr>
+          <p:cNvPr id="9" name="TextBox 8"/>
+          <p:cNvSpPr txBox="1"/>
+          <p:nvPr/>
+        </p:nvSpPr>
+        <p:spPr>
+          <a:xfrm>
+            <a:off x="1097280" y="3657600"/>
+            <a:ext cx="16459200" cy="5029200"/>
+          </a:xfrm>
+          <a:prstGeom prst="rect">
+            <a:avLst/>
+          </a:prstGeom>
+          <a:noFill/>
+        </p:spPr>
+        <p:txBody>
+          <a:bodyPr wrap="square">
+            <a:spAutoFit/>
+          </a:bodyPr>
+          <a:lstStyle/>
+          <a:p>
+            <a:pPr algn="l">
+              <a:spcAft>
+                <a:spcPts val="200"/>
+              </a:spcAft>
+              <a:defRPr sz="1400" b="1">
+                <a:solidFill>
+                  <a:srgbClr val="333333"/>
+                </a:solidFill>
+                <a:latin typeface="TT Commons Pro"/>
+              </a:defRPr>
+            </a:pPr>
+            <a:r>
+              <a:t>Supporting Materials</a:t>
+            </a:r>
+          </a:p>
+          <a:p>
+            <a:pPr algn="l">
+              <a:spcAft>
+                <a:spcPts val="200"/>
+              </a:spcAft>
+              <a:defRPr sz="400" b="0">
+                <a:solidFill>
+                  <a:srgbClr val="333333"/>
+                </a:solidFill>
+                <a:latin typeface="TT Commons Pro"/>
+              </a:defRPr>
+            </a:pPr>
+          </a:p>
+          <a:p>
+            <a:pPr algn="l">
+              <a:spcAft>
+                <a:spcPts val="200"/>
+              </a:spcAft>
+              <a:defRPr sz="1100" b="0">
+                <a:solidFill>
+                  <a:srgbClr val="333333"/>
+                </a:solidFill>
+                <a:latin typeface="TT Commons Pro"/>
+              </a:defRPr>
+            </a:pPr>
+            <a:r>
+              <a:t>Flowchart 1: Prepare-Perceive-Reason-Act-Follow-Up Architecture (full system flow)</a:t>
+            </a:r>
+          </a:p>
+          <a:p>
+            <a:pPr algn="l">
+              <a:spcAft>
+                <a:spcPts val="200"/>
+              </a:spcAft>
+              <a:defRPr sz="1100" b="0">
+                <a:solidFill>
+                  <a:srgbClr val="333333"/>
+                </a:solidFill>
+                <a:latin typeface="TT Commons Pro"/>
+              </a:defRPr>
+            </a:pPr>
+            <a:r>
+              <a:t>Flowchart 2: VIBE Component Architecture with Sections A-E, Tech Stack, KPIs, and Splunk Integration</a:t>
+            </a:r>
+          </a:p>
+          <a:p>
+            <a:pPr algn="l">
+              <a:spcAft>
+                <a:spcPts val="200"/>
+              </a:spcAft>
+              <a:defRPr sz="1100" b="0">
+                <a:solidFill>
+                  <a:srgbClr val="333333"/>
+                </a:solidFill>
+                <a:latin typeface="TT Commons Pro"/>
+              </a:defRPr>
+            </a:pPr>
+            <a:r>
+              <a:t>Flowchart 3: Three-Lane Marketplace Architecture (Developer, Admin, User Journeys)</a:t>
+            </a:r>
+          </a:p>
+          <a:p>
+            <a:pPr algn="l">
+              <a:spcAft>
+                <a:spcPts val="200"/>
+              </a:spcAft>
+              <a:defRPr sz="400" b="0">
+                <a:solidFill>
+                  <a:srgbClr val="333333"/>
+                </a:solidFill>
+                <a:latin typeface="TT Commons Pro"/>
+              </a:defRPr>
+            </a:pPr>
+          </a:p>
+          <a:p>
+            <a:pPr algn="l">
+              <a:spcAft>
+                <a:spcPts val="200"/>
+              </a:spcAft>
+              <a:defRPr sz="1100" b="0">
+                <a:solidFill>
+                  <a:srgbClr val="333333"/>
+                </a:solidFill>
+                <a:latin typeface="TT Commons Pro"/>
+              </a:defRPr>
+            </a:pPr>
+            <a:r>
+              <a:t>Technical Feasibility Assessment for all three solutions</a:t>
+            </a:r>
+          </a:p>
+          <a:p>
+            <a:pPr algn="l">
+              <a:spcAft>
+                <a:spcPts val="200"/>
+              </a:spcAft>
+              <a:defRPr sz="1100" b="0">
+                <a:solidFill>
+                  <a:srgbClr val="333333"/>
+                </a:solidFill>
+                <a:latin typeface="TT Commons Pro"/>
+              </a:defRPr>
+            </a:pPr>
+            <a:r>
+              <a:t>Implementation Risks &amp; System-Level Trade-Offs analysis</a:t>
+            </a:r>
+          </a:p>
+          <a:p>
+            <a:pPr algn="l">
+              <a:spcAft>
+                <a:spcPts val="200"/>
+              </a:spcAft>
+              <a:defRPr sz="1100" b="0">
+                <a:solidFill>
+                  <a:srgbClr val="333333"/>
+                </a:solidFill>
+                <a:latin typeface="TT Commons Pro"/>
+              </a:defRPr>
+            </a:pPr>
+            <a:r>
+              <a:t>Combined Projected Impact metrics table (12 KPIs)</a:t>
+            </a:r>
+          </a:p>
+          <a:p>
+            <a:pPr algn="l">
+              <a:spcAft>
+                <a:spcPts val="200"/>
+              </a:spcAft>
+              <a:defRPr sz="600" b="0">
+                <a:solidFill>
+                  <a:srgbClr val="333333"/>
+                </a:solidFill>
+                <a:latin typeface="TT Commons Pro"/>
+              </a:defRPr>
+            </a:pPr>
+          </a:p>
+          <a:p>
+            <a:pPr algn="l">
+              <a:spcAft>
+                <a:spcPts val="200"/>
+              </a:spcAft>
+              <a:defRPr sz="1000" b="0">
+                <a:solidFill>
+                  <a:srgbClr val="333333"/>
+                </a:solidFill>
+                <a:latin typeface="TT Commons Pro"/>
+              </a:defRPr>
+            </a:pPr>
+            <a:r>
+              <a:t>Sources: Cisco FY2024 10-K, Microsoft 10-K, Zoom 10-K, IDC UC&amp;C Tracker, Gartner Future of Work Survey, McKinsey Productivity Report, MarketsandMarkets Agentic AI Report, Splunk Documentation</a:t>
             </a:r>
           </a:p>
         </p:txBody>
@@ -10198,7 +12303,7 @@
                 <a:cs typeface="Lato Bold"/>
                 <a:sym typeface="Lato Bold"/>
               </a:rPr>
-              <a:t>Appendices A: </a:t>
+              <a:t>Appendix A: Sources &amp; References</a:t>
             </a:r>
           </a:p>
         </p:txBody>
@@ -10252,6 +12357,237 @@
                 <a:sym typeface="Lato Bold"/>
               </a:rPr>
               <a:t>Executive Summary</a:t>
+            </a:r>
+          </a:p>
+        </p:txBody>
+      </p:sp>
+      <p:sp>
+        <p:nvSpPr>
+          <p:cNvPr id="8" name="TextBox 7"/>
+          <p:cNvSpPr txBox="1"/>
+          <p:nvPr/>
+        </p:nvSpPr>
+        <p:spPr>
+          <a:xfrm>
+            <a:off x="1097280" y="1463040"/>
+            <a:ext cx="16459200" cy="7772400"/>
+          </a:xfrm>
+          <a:prstGeom prst="rect">
+            <a:avLst/>
+          </a:prstGeom>
+          <a:noFill/>
+        </p:spPr>
+        <p:txBody>
+          <a:bodyPr wrap="square">
+            <a:spAutoFit/>
+          </a:bodyPr>
+          <a:lstStyle/>
+          <a:p>
+            <a:pPr algn="l">
+              <a:spcAft>
+                <a:spcPts val="200"/>
+              </a:spcAft>
+              <a:defRPr sz="1000" b="0">
+                <a:solidFill>
+                  <a:srgbClr val="333333"/>
+                </a:solidFill>
+                <a:latin typeface="TT Commons Pro"/>
+              </a:defRPr>
+            </a:pPr>
+            <a:r>
+              <a:t>1. Cisco Systems. (2024). Annual Report (Form 10-K), Fiscal Year 2024.</a:t>
+            </a:r>
+          </a:p>
+          <a:p>
+            <a:pPr algn="l">
+              <a:spcAft>
+                <a:spcPts val="200"/>
+              </a:spcAft>
+              <a:defRPr sz="1000" b="0">
+                <a:solidFill>
+                  <a:srgbClr val="333333"/>
+                </a:solidFill>
+                <a:latin typeface="TT Commons Pro"/>
+              </a:defRPr>
+            </a:pPr>
+            <a:r>
+              <a:t>2. Microsoft Corporation. (2024). Annual Report (Form 10-K), Fiscal Year 2024.</a:t>
+            </a:r>
+          </a:p>
+          <a:p>
+            <a:pPr algn="l">
+              <a:spcAft>
+                <a:spcPts val="200"/>
+              </a:spcAft>
+              <a:defRPr sz="1000" b="0">
+                <a:solidFill>
+                  <a:srgbClr val="333333"/>
+                </a:solidFill>
+                <a:latin typeface="TT Commons Pro"/>
+              </a:defRPr>
+            </a:pPr>
+            <a:r>
+              <a:t>3. Zoom Video Communications. (2025). Annual Report (Form 10-K), Fiscal Year 2025.</a:t>
+            </a:r>
+          </a:p>
+          <a:p>
+            <a:pPr algn="l">
+              <a:spcAft>
+                <a:spcPts val="200"/>
+              </a:spcAft>
+              <a:defRPr sz="1000" b="0">
+                <a:solidFill>
+                  <a:srgbClr val="333333"/>
+                </a:solidFill>
+                <a:latin typeface="TT Commons Pro"/>
+              </a:defRPr>
+            </a:pPr>
+            <a:r>
+              <a:t>4. IDC. (2024). Worldwide Unified Communications &amp; Collaboration Market Tracker.</a:t>
+            </a:r>
+          </a:p>
+          <a:p>
+            <a:pPr algn="l">
+              <a:spcAft>
+                <a:spcPts val="200"/>
+              </a:spcAft>
+              <a:defRPr sz="1000" b="0">
+                <a:solidFill>
+                  <a:srgbClr val="333333"/>
+                </a:solidFill>
+                <a:latin typeface="TT Commons Pro"/>
+              </a:defRPr>
+            </a:pPr>
+            <a:r>
+              <a:t>5. Gartner. (2024). Future of Work Survey: Hybrid Work Trends.</a:t>
+            </a:r>
+          </a:p>
+          <a:p>
+            <a:pPr algn="l">
+              <a:spcAft>
+                <a:spcPts val="200"/>
+              </a:spcAft>
+              <a:defRPr sz="1000" b="0">
+                <a:solidFill>
+                  <a:srgbClr val="333333"/>
+                </a:solidFill>
+                <a:latin typeface="TT Commons Pro"/>
+              </a:defRPr>
+            </a:pPr>
+            <a:r>
+              <a:t>6. McKinsey &amp; Company. (2024). Future of Work Report: Meeting Productivity.</a:t>
+            </a:r>
+          </a:p>
+          <a:p>
+            <a:pPr algn="l">
+              <a:spcAft>
+                <a:spcPts val="200"/>
+              </a:spcAft>
+              <a:defRPr sz="1000" b="0">
+                <a:solidFill>
+                  <a:srgbClr val="333333"/>
+                </a:solidFill>
+                <a:latin typeface="TT Commons Pro"/>
+              </a:defRPr>
+            </a:pPr>
+            <a:r>
+              <a:t>7. MarketsandMarkets. (2024). Agentic AI Market Report: Global Forecast to 2030.</a:t>
+            </a:r>
+          </a:p>
+          <a:p>
+            <a:pPr algn="l">
+              <a:spcAft>
+                <a:spcPts val="200"/>
+              </a:spcAft>
+              <a:defRPr sz="1000" b="0">
+                <a:solidFill>
+                  <a:srgbClr val="333333"/>
+                </a:solidFill>
+                <a:latin typeface="TT Commons Pro"/>
+              </a:defRPr>
+            </a:pPr>
+            <a:r>
+              <a:t>8. Microsoft. (2024). Work Trend Index: Annual Report on Workplace Trends.</a:t>
+            </a:r>
+          </a:p>
+          <a:p>
+            <a:pPr algn="l">
+              <a:spcAft>
+                <a:spcPts val="200"/>
+              </a:spcAft>
+              <a:defRPr sz="1000" b="0">
+                <a:solidFill>
+                  <a:srgbClr val="333333"/>
+                </a:solidFill>
+                <a:latin typeface="TT Commons Pro"/>
+              </a:defRPr>
+            </a:pPr>
+            <a:r>
+              <a:t>9. Cisco Webex. (2025). AI Assistant and AI Codec Technical Documentation.</a:t>
+            </a:r>
+          </a:p>
+          <a:p>
+            <a:pPr algn="l">
+              <a:spcAft>
+                <a:spcPts val="200"/>
+              </a:spcAft>
+              <a:defRPr sz="1000" b="0">
+                <a:solidFill>
+                  <a:srgbClr val="333333"/>
+                </a:solidFill>
+                <a:latin typeface="TT Commons Pro"/>
+              </a:defRPr>
+            </a:pPr>
+            <a:r>
+              <a:t>10. Microsoft. (2025). Microsoft 365 Copilot Product Documentation.</a:t>
+            </a:r>
+          </a:p>
+          <a:p>
+            <a:pPr algn="l">
+              <a:spcAft>
+                <a:spcPts val="200"/>
+              </a:spcAft>
+              <a:defRPr sz="1000" b="0">
+                <a:solidFill>
+                  <a:srgbClr val="333333"/>
+                </a:solidFill>
+                <a:latin typeface="TT Commons Pro"/>
+              </a:defRPr>
+            </a:pPr>
+            <a:r>
+              <a:t>11. Zoom. (2025). Zoom AI Companion 2.0 Product Documentation.</a:t>
+            </a:r>
+          </a:p>
+          <a:p>
+            <a:pPr algn="l">
+              <a:spcAft>
+                <a:spcPts val="200"/>
+              </a:spcAft>
+              <a:defRPr sz="1000" b="0">
+                <a:solidFill>
+                  <a:srgbClr val="333333"/>
+                </a:solidFill>
+                <a:latin typeface="TT Commons Pro"/>
+              </a:defRPr>
+            </a:pPr>
+            <a:r>
+              <a:t>12. Salesforce. (2024). AppExchange Marketplace Economics Model.</a:t>
+            </a:r>
+          </a:p>
+          <a:p>
+            <a:pPr algn="l">
+              <a:spcAft>
+                <a:spcPts val="200"/>
+              </a:spcAft>
+              <a:defRPr sz="1000" b="0">
+                <a:solidFill>
+                  <a:srgbClr val="333333"/>
+                </a:solidFill>
+                <a:latin typeface="TT Commons Pro"/>
+              </a:defRPr>
+            </a:pPr>
+            <a:r>
+              <a:t>13. Gartner. (2024). DEI in Technology Procurement Report.</a:t>
             </a:r>
           </a:p>
         </p:txBody>
@@ -11114,6 +13450,10 @@
               <a:round/>
             </a:ln>
           </p:spPr>
+          <p:txBody>
+            <a:bodyPr/>
+            <a:p/>
+          </p:txBody>
         </p:sp>
         <p:sp>
           <p:nvSpPr>
@@ -11152,7 +13492,7 @@
                   <a:cs typeface="Canva Sans Bold"/>
                   <a:sym typeface="Canva Sans Bold"/>
                 </a:rPr>
-                <a:t>Background</a:t>
+                <a:t>Industry Analysis</a:t>
               </a:r>
             </a:p>
           </p:txBody>
@@ -11256,6 +13596,10 @@
               <a:round/>
             </a:ln>
           </p:spPr>
+          <p:txBody>
+            <a:bodyPr/>
+            <a:p/>
+          </p:txBody>
         </p:sp>
         <p:sp>
           <p:nvSpPr>
@@ -11398,6 +13742,10 @@
               <a:round/>
             </a:ln>
           </p:spPr>
+          <p:txBody>
+            <a:bodyPr/>
+            <a:p/>
+          </p:txBody>
         </p:sp>
         <p:sp>
           <p:nvSpPr>
@@ -11540,6 +13888,10 @@
               <a:round/>
             </a:ln>
           </p:spPr>
+          <p:txBody>
+            <a:bodyPr/>
+            <a:p/>
+          </p:txBody>
         </p:sp>
         <p:sp>
           <p:nvSpPr>
@@ -11578,7 +13930,7 @@
                   <a:cs typeface="Canva Sans Bold"/>
                   <a:sym typeface="Canva Sans Bold"/>
                 </a:rPr>
-                <a:t>Implementations</a:t>
+                <a:t>Implementation Timeline</a:t>
               </a:r>
             </a:p>
           </p:txBody>
@@ -11682,6 +14034,10 @@
               <a:round/>
             </a:ln>
           </p:spPr>
+          <p:txBody>
+            <a:bodyPr/>
+            <a:p/>
+          </p:txBody>
         </p:sp>
         <p:sp>
           <p:nvSpPr>
@@ -11824,6 +14180,10 @@
               <a:round/>
             </a:ln>
           </p:spPr>
+          <p:txBody>
+            <a:bodyPr/>
+            <a:p/>
+          </p:txBody>
         </p:sp>
         <p:sp>
           <p:nvSpPr>
@@ -11862,7 +14222,7 @@
                   <a:cs typeface="Canva Sans Bold"/>
                   <a:sym typeface="Canva Sans Bold"/>
                 </a:rPr>
-                <a:t>Performance Indicators</a:t>
+                <a:t>Key Performance Indicators</a:t>
               </a:r>
             </a:p>
           </p:txBody>
@@ -11966,6 +14326,10 @@
               <a:round/>
             </a:ln>
           </p:spPr>
+          <p:txBody>
+            <a:bodyPr/>
+            <a:p/>
+          </p:txBody>
         </p:sp>
         <p:sp>
           <p:nvSpPr>
@@ -12108,6 +14472,10 @@
               <a:round/>
             </a:ln>
           </p:spPr>
+          <p:txBody>
+            <a:bodyPr/>
+            <a:p/>
+          </p:txBody>
         </p:sp>
         <p:sp>
           <p:nvSpPr>
@@ -12324,7 +14692,7 @@
                 <a:cs typeface="Lato Bold"/>
                 <a:sym typeface="Lato Bold"/>
               </a:rPr>
-              <a:t>Industry Analysis </a:t>
+              <a:t>Industry Analysis | Problem Identification | Recommendations | Implementation | Financials | KPIs | Risks | Executive Summary</a:t>
             </a:r>
             <a:r>
               <a:rPr lang="en-US" sz="2426">
@@ -12336,7 +14704,7 @@
                 <a:cs typeface="Lato"/>
                 <a:sym typeface="Lato"/>
               </a:rPr>
-              <a:t>| Problem Identification | Recommendations | Implementation | Financials | Executive Summary</a:t>
+              <a:t>Industry Analysis | Problem Identification | Recommendations | Implementation | Financials | KPIs | Risks | Executive Summary</a:t>
             </a:r>
           </a:p>
         </p:txBody>
@@ -12442,6 +14810,10 @@
             <a:tailEnd type="none" len="sm" w="sm"/>
           </a:ln>
         </p:spPr>
+        <p:txBody>
+          <a:bodyPr/>
+          <a:p/>
+        </p:txBody>
       </p:sp>
       <p:sp>
         <p:nvSpPr>
@@ -12488,6 +14860,10 @@
             </a:stretch>
           </a:blipFill>
         </p:spPr>
+        <p:txBody>
+          <a:bodyPr/>
+          <a:p/>
+        </p:txBody>
       </p:sp>
       <p:sp>
         <p:nvSpPr>
@@ -12534,6 +14910,10 @@
             </a:stretch>
           </a:blipFill>
         </p:spPr>
+        <p:txBody>
+          <a:bodyPr/>
+          <a:p/>
+        </p:txBody>
       </p:sp>
       <p:sp>
         <p:nvSpPr>
@@ -12580,6 +14960,10 @@
             </a:stretch>
           </a:blipFill>
         </p:spPr>
+        <p:txBody>
+          <a:bodyPr/>
+          <a:p/>
+        </p:txBody>
       </p:sp>
       <p:grpSp>
         <p:nvGrpSpPr>
@@ -12993,7 +15377,543 @@
                 <a:cs typeface="Open Sans Bold"/>
                 <a:sym typeface="Open Sans Bold"/>
               </a:rPr>
-              <a:t>Text</a:t>
+              <a:t/>
+            </a:r>
+          </a:p>
+        </p:txBody>
+      </p:sp>
+      <p:sp>
+        <p:nvSpPr>
+          <p:cNvPr id="18" name="TextBox 17"/>
+          <p:cNvSpPr txBox="1"/>
+          <p:nvPr/>
+        </p:nvSpPr>
+        <p:spPr>
+          <a:xfrm>
+            <a:off x="1097280" y="1463040"/>
+            <a:ext cx="5029200" cy="548640"/>
+          </a:xfrm>
+          <a:prstGeom prst="rect">
+            <a:avLst/>
+          </a:prstGeom>
+          <a:noFill/>
+        </p:spPr>
+        <p:txBody>
+          <a:bodyPr wrap="square">
+            <a:spAutoFit/>
+          </a:bodyPr>
+          <a:lstStyle/>
+          <a:p>
+            <a:pPr algn="l">
+              <a:defRPr sz="1600" b="1">
+                <a:solidFill>
+                  <a:srgbClr val="204F69"/>
+                </a:solidFill>
+                <a:latin typeface="Lato"/>
+              </a:defRPr>
+            </a:pPr>
+            <a:r>
+              <a:t>Video Conferencing Market</a:t>
+            </a:r>
+          </a:p>
+        </p:txBody>
+      </p:sp>
+      <p:sp>
+        <p:nvSpPr>
+          <p:cNvPr id="19" name="TextBox 18"/>
+          <p:cNvSpPr txBox="1"/>
+          <p:nvPr/>
+        </p:nvSpPr>
+        <p:spPr>
+          <a:xfrm>
+            <a:off x="1097280" y="2194560"/>
+            <a:ext cx="7315200" cy="5943600"/>
+          </a:xfrm>
+          <a:prstGeom prst="rect">
+            <a:avLst/>
+          </a:prstGeom>
+          <a:noFill/>
+        </p:spPr>
+        <p:txBody>
+          <a:bodyPr wrap="square">
+            <a:spAutoFit/>
+          </a:bodyPr>
+          <a:lstStyle/>
+          <a:p>
+            <a:pPr algn="l">
+              <a:spcAft>
+                <a:spcPts val="200"/>
+              </a:spcAft>
+              <a:defRPr sz="1400" b="1">
+                <a:solidFill>
+                  <a:srgbClr val="333333"/>
+                </a:solidFill>
+                <a:latin typeface="TT Commons Pro"/>
+              </a:defRPr>
+            </a:pPr>
+            <a:r>
+              <a:t>Competitive Landscape</a:t>
+            </a:r>
+          </a:p>
+          <a:p>
+            <a:pPr algn="l">
+              <a:spcAft>
+                <a:spcPts val="200"/>
+              </a:spcAft>
+              <a:defRPr sz="600" b="0">
+                <a:solidFill>
+                  <a:srgbClr val="333333"/>
+                </a:solidFill>
+                <a:latin typeface="TT Commons Pro"/>
+              </a:defRPr>
+            </a:pPr>
+          </a:p>
+          <a:p>
+            <a:pPr algn="l">
+              <a:spcAft>
+                <a:spcPts val="200"/>
+              </a:spcAft>
+              <a:defRPr sz="1100" b="0">
+                <a:solidFill>
+                  <a:srgbClr val="333333"/>
+                </a:solidFill>
+                <a:latin typeface="TT Commons Pro"/>
+              </a:defRPr>
+            </a:pPr>
+            <a:r>
+              <a:t>Microsoft Teams: 320M+ monthly active users, 2,000+ integrations, Copilot AI across Office 365</a:t>
+            </a:r>
+          </a:p>
+          <a:p>
+            <a:pPr algn="l">
+              <a:spcAft>
+                <a:spcPts val="200"/>
+              </a:spcAft>
+              <a:defRPr sz="400" b="0">
+                <a:solidFill>
+                  <a:srgbClr val="333333"/>
+                </a:solidFill>
+                <a:latin typeface="TT Commons Pro"/>
+              </a:defRPr>
+            </a:pPr>
+          </a:p>
+          <a:p>
+            <a:pPr algn="l">
+              <a:spcAft>
+                <a:spcPts val="200"/>
+              </a:spcAft>
+              <a:defRPr sz="1100" b="0">
+                <a:solidFill>
+                  <a:srgbClr val="333333"/>
+                </a:solidFill>
+                <a:latin typeface="TT Commons Pro"/>
+              </a:defRPr>
+            </a:pPr>
+            <a:r>
+              <a:t>Zoom: 300M+ daily meeting participants, 2,500+ integrations, AI Companion 2.0 with agentic features at no extra cost</a:t>
+            </a:r>
+          </a:p>
+          <a:p>
+            <a:pPr algn="l">
+              <a:spcAft>
+                <a:spcPts val="200"/>
+              </a:spcAft>
+              <a:defRPr sz="400" b="0">
+                <a:solidFill>
+                  <a:srgbClr val="333333"/>
+                </a:solidFill>
+                <a:latin typeface="TT Commons Pro"/>
+              </a:defRPr>
+            </a:pPr>
+          </a:p>
+          <a:p>
+            <a:pPr algn="l">
+              <a:spcAft>
+                <a:spcPts val="200"/>
+              </a:spcAft>
+              <a:defRPr sz="1100" b="0">
+                <a:solidFill>
+                  <a:srgbClr val="333333"/>
+                </a:solidFill>
+                <a:latin typeface="TT Commons Pro"/>
+              </a:defRPr>
+            </a:pPr>
+            <a:r>
+              <a:t>Webex: Strong in enterprise/government, FedRAMP &amp; HIPAA certified, AI Codec technology, but smaller integration ecosystem</a:t>
+            </a:r>
+          </a:p>
+          <a:p>
+            <a:pPr algn="l">
+              <a:spcAft>
+                <a:spcPts val="200"/>
+              </a:spcAft>
+              <a:defRPr sz="800" b="0">
+                <a:solidFill>
+                  <a:srgbClr val="333333"/>
+                </a:solidFill>
+                <a:latin typeface="TT Commons Pro"/>
+              </a:defRPr>
+            </a:pPr>
+          </a:p>
+          <a:p>
+            <a:pPr algn="l">
+              <a:spcAft>
+                <a:spcPts val="200"/>
+              </a:spcAft>
+              <a:defRPr sz="1400" b="1">
+                <a:solidFill>
+                  <a:srgbClr val="333333"/>
+                </a:solidFill>
+                <a:latin typeface="TT Commons Pro"/>
+              </a:defRPr>
+            </a:pPr>
+            <a:r>
+              <a:t>Key Market Trends</a:t>
+            </a:r>
+          </a:p>
+          <a:p>
+            <a:pPr algn="l">
+              <a:spcAft>
+                <a:spcPts val="200"/>
+              </a:spcAft>
+              <a:defRPr sz="400" b="0">
+                <a:solidFill>
+                  <a:srgbClr val="333333"/>
+                </a:solidFill>
+                <a:latin typeface="TT Commons Pro"/>
+              </a:defRPr>
+            </a:pPr>
+          </a:p>
+          <a:p>
+            <a:pPr algn="l">
+              <a:spcAft>
+                <a:spcPts val="200"/>
+              </a:spcAft>
+              <a:defRPr sz="1100" b="0">
+                <a:solidFill>
+                  <a:srgbClr val="333333"/>
+                </a:solidFill>
+                <a:latin typeface="TT Commons Pro"/>
+              </a:defRPr>
+            </a:pPr>
+            <a:r>
+              <a:t>Agentic AI projected to reach $65.5B by 2030 (45% CAGR)</a:t>
+            </a:r>
+          </a:p>
+          <a:p>
+            <a:pPr algn="l">
+              <a:spcAft>
+                <a:spcPts val="200"/>
+              </a:spcAft>
+              <a:defRPr sz="400" b="0">
+                <a:solidFill>
+                  <a:srgbClr val="333333"/>
+                </a:solidFill>
+                <a:latin typeface="TT Commons Pro"/>
+              </a:defRPr>
+            </a:pPr>
+          </a:p>
+          <a:p>
+            <a:pPr algn="l">
+              <a:spcAft>
+                <a:spcPts val="200"/>
+              </a:spcAft>
+              <a:defRPr sz="1100" b="0">
+                <a:solidFill>
+                  <a:srgbClr val="333333"/>
+                </a:solidFill>
+                <a:latin typeface="TT Commons Pro"/>
+              </a:defRPr>
+            </a:pPr>
+            <a:r>
+              <a:t>Hybrid work: 74% of enterprises adopting permanent hybrid models</a:t>
+            </a:r>
+          </a:p>
+          <a:p>
+            <a:pPr algn="l">
+              <a:spcAft>
+                <a:spcPts val="200"/>
+              </a:spcAft>
+              <a:defRPr sz="400" b="0">
+                <a:solidFill>
+                  <a:srgbClr val="333333"/>
+                </a:solidFill>
+                <a:latin typeface="TT Commons Pro"/>
+              </a:defRPr>
+            </a:pPr>
+          </a:p>
+          <a:p>
+            <a:pPr algn="l">
+              <a:spcAft>
+                <a:spcPts val="200"/>
+              </a:spcAft>
+              <a:defRPr sz="1100" b="0">
+                <a:solidFill>
+                  <a:srgbClr val="333333"/>
+                </a:solidFill>
+                <a:latin typeface="TT Commons Pro"/>
+              </a:defRPr>
+            </a:pPr>
+            <a:r>
+              <a:t>AI-powered productivity is the new differentiator, not video quality</a:t>
+            </a:r>
+          </a:p>
+        </p:txBody>
+      </p:sp>
+      <p:sp>
+        <p:nvSpPr>
+          <p:cNvPr id="20" name="TextBox 19"/>
+          <p:cNvSpPr txBox="1"/>
+          <p:nvPr/>
+        </p:nvSpPr>
+        <p:spPr>
+          <a:xfrm>
+            <a:off x="9601200" y="1828800"/>
+            <a:ext cx="7772400" cy="6400800"/>
+          </a:xfrm>
+          <a:prstGeom prst="rect">
+            <a:avLst/>
+          </a:prstGeom>
+          <a:noFill/>
+        </p:spPr>
+        <p:txBody>
+          <a:bodyPr wrap="square">
+            <a:spAutoFit/>
+          </a:bodyPr>
+          <a:lstStyle/>
+          <a:p>
+            <a:pPr algn="l">
+              <a:spcAft>
+                <a:spcPts val="200"/>
+              </a:spcAft>
+              <a:defRPr sz="1400" b="1">
+                <a:solidFill>
+                  <a:srgbClr val="204F69"/>
+                </a:solidFill>
+                <a:latin typeface="TT Commons Pro"/>
+              </a:defRPr>
+            </a:pPr>
+            <a:r>
+              <a:t>Cisco Webex Strengths</a:t>
+            </a:r>
+          </a:p>
+          <a:p>
+            <a:pPr algn="l">
+              <a:spcAft>
+                <a:spcPts val="200"/>
+              </a:spcAft>
+              <a:defRPr sz="400" b="0">
+                <a:solidFill>
+                  <a:srgbClr val="204F69"/>
+                </a:solidFill>
+                <a:latin typeface="TT Commons Pro"/>
+              </a:defRPr>
+            </a:pPr>
+          </a:p>
+          <a:p>
+            <a:pPr algn="l">
+              <a:spcAft>
+                <a:spcPts val="200"/>
+              </a:spcAft>
+              <a:defRPr sz="1100" b="0">
+                <a:solidFill>
+                  <a:srgbClr val="204F69"/>
+                </a:solidFill>
+                <a:latin typeface="TT Commons Pro"/>
+              </a:defRPr>
+            </a:pPr>
+            <a:r>
+              <a:t>$7.98B annual R&amp;D budget</a:t>
+            </a:r>
+          </a:p>
+          <a:p>
+            <a:pPr algn="l">
+              <a:spcAft>
+                <a:spcPts val="200"/>
+              </a:spcAft>
+              <a:defRPr sz="400" b="0">
+                <a:solidFill>
+                  <a:srgbClr val="204F69"/>
+                </a:solidFill>
+                <a:latin typeface="TT Commons Pro"/>
+              </a:defRPr>
+            </a:pPr>
+          </a:p>
+          <a:p>
+            <a:pPr algn="l">
+              <a:spcAft>
+                <a:spcPts val="200"/>
+              </a:spcAft>
+              <a:defRPr sz="1100" b="0">
+                <a:solidFill>
+                  <a:srgbClr val="204F69"/>
+                </a:solidFill>
+                <a:latin typeface="TT Commons Pro"/>
+              </a:defRPr>
+            </a:pPr>
+            <a:r>
+              <a:t>$28B Splunk acquisition for enterprise observability</a:t>
+            </a:r>
+          </a:p>
+          <a:p>
+            <a:pPr algn="l">
+              <a:spcAft>
+                <a:spcPts val="200"/>
+              </a:spcAft>
+              <a:defRPr sz="400" b="0">
+                <a:solidFill>
+                  <a:srgbClr val="204F69"/>
+                </a:solidFill>
+                <a:latin typeface="TT Commons Pro"/>
+              </a:defRPr>
+            </a:pPr>
+          </a:p>
+          <a:p>
+            <a:pPr algn="l">
+              <a:spcAft>
+                <a:spcPts val="200"/>
+              </a:spcAft>
+              <a:defRPr sz="1100" b="0">
+                <a:solidFill>
+                  <a:srgbClr val="204F69"/>
+                </a:solidFill>
+                <a:latin typeface="TT Commons Pro"/>
+              </a:defRPr>
+            </a:pPr>
+            <a:r>
+              <a:t>FedRAMP, HIPAA, SOC 2 Type II certified</a:t>
+            </a:r>
+          </a:p>
+          <a:p>
+            <a:pPr algn="l">
+              <a:spcAft>
+                <a:spcPts val="200"/>
+              </a:spcAft>
+              <a:defRPr sz="400" b="0">
+                <a:solidFill>
+                  <a:srgbClr val="204F69"/>
+                </a:solidFill>
+                <a:latin typeface="TT Commons Pro"/>
+              </a:defRPr>
+            </a:pPr>
+          </a:p>
+          <a:p>
+            <a:pPr algn="l">
+              <a:spcAft>
+                <a:spcPts val="200"/>
+              </a:spcAft>
+              <a:defRPr sz="1100" b="0">
+                <a:solidFill>
+                  <a:srgbClr val="204F69"/>
+                </a:solidFill>
+                <a:latin typeface="TT Commons Pro"/>
+              </a:defRPr>
+            </a:pPr>
+            <a:r>
+              <a:t>Webex AI Codec: industry-leading ML audio pipeline</a:t>
+            </a:r>
+          </a:p>
+          <a:p>
+            <a:pPr algn="l">
+              <a:spcAft>
+                <a:spcPts val="200"/>
+              </a:spcAft>
+              <a:defRPr sz="400" b="0">
+                <a:solidFill>
+                  <a:srgbClr val="204F69"/>
+                </a:solidFill>
+                <a:latin typeface="TT Commons Pro"/>
+              </a:defRPr>
+            </a:pPr>
+          </a:p>
+          <a:p>
+            <a:pPr algn="l">
+              <a:spcAft>
+                <a:spcPts val="200"/>
+              </a:spcAft>
+              <a:defRPr sz="1100" b="0">
+                <a:solidFill>
+                  <a:srgbClr val="204F69"/>
+                </a:solidFill>
+                <a:latin typeface="TT Commons Pro"/>
+              </a:defRPr>
+            </a:pPr>
+            <a:r>
+              <a:t>600M+ meeting minutes processed monthly</a:t>
+            </a:r>
+          </a:p>
+          <a:p>
+            <a:pPr algn="l">
+              <a:spcAft>
+                <a:spcPts val="200"/>
+              </a:spcAft>
+              <a:defRPr sz="800" b="0">
+                <a:solidFill>
+                  <a:srgbClr val="204F69"/>
+                </a:solidFill>
+                <a:latin typeface="TT Commons Pro"/>
+              </a:defRPr>
+            </a:pPr>
+          </a:p>
+          <a:p>
+            <a:pPr algn="l">
+              <a:spcAft>
+                <a:spcPts val="200"/>
+              </a:spcAft>
+              <a:defRPr sz="1400" b="1">
+                <a:solidFill>
+                  <a:srgbClr val="204F69"/>
+                </a:solidFill>
+                <a:latin typeface="TT Commons Pro"/>
+              </a:defRPr>
+            </a:pPr>
+            <a:r>
+              <a:t>The Opportunity</a:t>
+            </a:r>
+          </a:p>
+          <a:p>
+            <a:pPr algn="l">
+              <a:spcAft>
+                <a:spcPts val="200"/>
+              </a:spcAft>
+              <a:defRPr sz="400" b="0">
+                <a:solidFill>
+                  <a:srgbClr val="204F69"/>
+                </a:solidFill>
+                <a:latin typeface="TT Commons Pro"/>
+              </a:defRPr>
+            </a:pPr>
+          </a:p>
+          <a:p>
+            <a:pPr algn="l">
+              <a:spcAft>
+                <a:spcPts val="200"/>
+              </a:spcAft>
+              <a:defRPr sz="1100" b="0">
+                <a:solidFill>
+                  <a:srgbClr val="204F69"/>
+                </a:solidFill>
+                <a:latin typeface="TT Commons Pro"/>
+              </a:defRPr>
+            </a:pPr>
+            <a:r>
+              <a:t>No platform has launched a dedicated AI agent marketplace.</a:t>
+            </a:r>
+          </a:p>
+          <a:p>
+            <a:pPr algn="l">
+              <a:spcAft>
+                <a:spcPts val="200"/>
+              </a:spcAft>
+              <a:defRPr sz="1100" b="0">
+                <a:solidFill>
+                  <a:srgbClr val="204F69"/>
+                </a:solidFill>
+                <a:latin typeface="TT Commons Pro"/>
+              </a:defRPr>
+            </a:pPr>
+            <a:r>
+              <a:t>Webex can leapfrog competitors by combining Cisco security + Splunk observability + agentic AI.</a:t>
             </a:r>
           </a:p>
         </p:txBody>
@@ -13349,7 +16269,7 @@
                 <a:cs typeface="Lato"/>
                 <a:sym typeface="Lato"/>
               </a:rPr>
-              <a:t> </a:t>
+              <a:t/>
             </a:r>
           </a:p>
           <a:p>
@@ -13817,7 +16737,7 @@
                 <a:cs typeface="Open Sans Bold"/>
                 <a:sym typeface="Open Sans Bold"/>
               </a:rPr>
-              <a:t>Probl</a:t>
+              <a:t>Problem #2</a:t>
             </a:r>
             <a:r>
               <a:rPr lang="en-US" b="true" sz="4277">
@@ -13829,7 +16749,7 @@
                 <a:cs typeface="Open Sans Bold"/>
                 <a:sym typeface="Open Sans Bold"/>
               </a:rPr>
-              <a:t>em #2</a:t>
+              <a:t/>
             </a:r>
           </a:p>
         </p:txBody>
@@ -13873,7 +16793,7 @@
                 <a:cs typeface="Open Sans"/>
                 <a:sym typeface="Open Sans"/>
               </a:rPr>
-              <a:t>Text</a:t>
+              <a:t>Webex AI is passive: it summarizes meetings but cannot prepare users, execute tasks, or follow up on action items.</a:t>
             </a:r>
           </a:p>
         </p:txBody>
@@ -13917,7 +16837,7 @@
                 <a:cs typeface="Open Sans"/>
                 <a:sym typeface="Open Sans"/>
               </a:rPr>
-              <a:t>Text</a:t>
+              <a:t>Webex excludes non-native speakers and non-technical users with language barriers, jargon, and no type-to-speak.</a:t>
             </a:r>
           </a:p>
         </p:txBody>
@@ -14122,7 +17042,7 @@
                 <a:cs typeface="Open Sans Bold"/>
                 <a:sym typeface="Open Sans Bold"/>
               </a:rPr>
-              <a:t>Pr</a:t>
+              <a:t>Problem #3</a:t>
             </a:r>
             <a:r>
               <a:rPr lang="en-US" b="true" sz="4277">
@@ -14134,7 +17054,7 @@
                 <a:cs typeface="Open Sans Bold"/>
                 <a:sym typeface="Open Sans Bold"/>
               </a:rPr>
-              <a:t>oblem #3</a:t>
+              <a:t/>
             </a:r>
           </a:p>
         </p:txBody>
@@ -14178,7 +17098,7 @@
                 <a:cs typeface="Open Sans"/>
                 <a:sym typeface="Open Sans"/>
               </a:rPr>
-              <a:t>T</a:t>
+              <a:t>Webex has a weaker developer ecosystem: Teams has 2,000+, Zoom has 2,500+ integrations. No AI agent marketplace exists.</a:t>
             </a:r>
             <a:r>
               <a:rPr lang="en-US" sz="2309">
@@ -14190,7 +17110,7 @@
                 <a:cs typeface="Open Sans"/>
                 <a:sym typeface="Open Sans"/>
               </a:rPr>
-              <a:t>ext</a:t>
+              <a:t/>
             </a:r>
           </a:p>
         </p:txBody>
@@ -15213,7 +18133,7 @@
                 <a:cs typeface="Open Sans Bold Italics"/>
                 <a:sym typeface="Open Sans Bold Italics"/>
               </a:rPr>
-              <a:t>Some creative name for our solutions</a:t>
+              <a:t>Repositioning Webex with Three AI-Powered Solutions</a:t>
             </a:r>
           </a:p>
         </p:txBody>
@@ -15257,7 +18177,7 @@
                 <a:cs typeface="Open Sans Bold"/>
                 <a:sym typeface="Open Sans Bold"/>
               </a:rPr>
-              <a:t>Algorithm</a:t>
+              <a:t>AI Meeting Prep &amp; Workflow Orchestrator</a:t>
             </a:r>
           </a:p>
         </p:txBody>
@@ -15301,7 +18221,7 @@
                 <a:cs typeface="Open Sans Bold"/>
                 <a:sym typeface="Open Sans Bold"/>
               </a:rPr>
-              <a:t>Text</a:t>
+              <a:t>Transforms Webex from passive summarizer to agentic AI: Prepare, Perceive, Reason, Act, Follow-Up across the full meeting lifecycle.</a:t>
             </a:r>
           </a:p>
         </p:txBody>
@@ -15389,7 +18309,7 @@
                 <a:cs typeface="Open Sans Bold"/>
                 <a:sym typeface="Open Sans Bold"/>
               </a:rPr>
-              <a:t>Text</a:t>
+              <a:t>Real-time voice boost, live translation (100+ languages), jargon simplification, and type-to-speak for inclusive meetings.</a:t>
             </a:r>
           </a:p>
         </p:txBody>
@@ -15521,7 +18441,7 @@
                 <a:cs typeface="Open Sans Bold"/>
                 <a:sym typeface="Open Sans Bold"/>
               </a:rPr>
-              <a:t>Brand Ambassadors</a:t>
+              <a:t>VIBE - Voice &amp; Language Intelligence</a:t>
             </a:r>
           </a:p>
         </p:txBody>
@@ -15565,7 +18485,7 @@
                 <a:cs typeface="Open Sans Bold"/>
                 <a:sym typeface="Open Sans Bold"/>
               </a:rPr>
-              <a:t>Category</a:t>
+              <a:t>Secure AI Agent Marketplace</a:t>
             </a:r>
           </a:p>
         </p:txBody>
@@ -15609,7 +18529,7 @@
                 <a:cs typeface="Open Sans Bold"/>
                 <a:sym typeface="Open Sans Bold"/>
               </a:rPr>
-              <a:t>Text</a:t>
+              <a:t>Industry-first marketplace: developers build, Cisco certifies, admins deploy, users benefit. 500+ agents Year 1.</a:t>
             </a:r>
           </a:p>
         </p:txBody>
@@ -15891,7 +18811,7 @@
                 <a:cs typeface="Lato Bold"/>
                 <a:sym typeface="Lato Bold"/>
               </a:rPr>
-              <a:t>Solution #1</a:t>
+              <a:t>AI Meeting Prep &amp; Workflow Orchestrator</a:t>
             </a:r>
           </a:p>
         </p:txBody>
@@ -15997,7 +18917,471 @@
                 <a:cs typeface="Open Sans Bold"/>
                 <a:sym typeface="Open Sans Bold"/>
               </a:rPr>
-              <a:t>Text</a:t>
+              <a:t/>
+            </a:r>
+          </a:p>
+        </p:txBody>
+      </p:sp>
+      <p:sp>
+        <p:nvSpPr>
+          <p:cNvPr id="9" name="TextBox 8"/>
+          <p:cNvSpPr txBox="1"/>
+          <p:nvPr/>
+        </p:nvSpPr>
+        <p:spPr>
+          <a:xfrm>
+            <a:off x="1097280" y="1463040"/>
+            <a:ext cx="7772400" cy="7772400"/>
+          </a:xfrm>
+          <a:prstGeom prst="rect">
+            <a:avLst/>
+          </a:prstGeom>
+          <a:noFill/>
+        </p:spPr>
+        <p:txBody>
+          <a:bodyPr wrap="square">
+            <a:spAutoFit/>
+          </a:bodyPr>
+          <a:lstStyle/>
+          <a:p>
+            <a:pPr algn="l">
+              <a:spcAft>
+                <a:spcPts val="200"/>
+              </a:spcAft>
+              <a:defRPr sz="1400" b="1">
+                <a:solidFill>
+                  <a:srgbClr val="333333"/>
+                </a:solidFill>
+                <a:latin typeface="TT Commons Pro"/>
+              </a:defRPr>
+            </a:pPr>
+            <a:r>
+              <a:t>Problem: Webex AI Cannot Execute Meetings</a:t>
+            </a:r>
+          </a:p>
+          <a:p>
+            <a:pPr algn="l">
+              <a:spcAft>
+                <a:spcPts val="200"/>
+              </a:spcAft>
+              <a:defRPr sz="400" b="0">
+                <a:solidFill>
+                  <a:srgbClr val="333333"/>
+                </a:solidFill>
+                <a:latin typeface="TT Commons Pro"/>
+              </a:defRPr>
+            </a:pPr>
+          </a:p>
+          <a:p>
+            <a:pPr algn="l">
+              <a:spcAft>
+                <a:spcPts val="200"/>
+              </a:spcAft>
+              <a:defRPr sz="1100" b="0">
+                <a:solidFill>
+                  <a:srgbClr val="333333"/>
+                </a:solidFill>
+                <a:latin typeface="TT Commons Pro"/>
+              </a:defRPr>
+            </a:pPr>
+            <a:r>
+              <a:t>Webex AI tells users what happened but does not prepare them, act on decisions, or follow up. Competitors (Copilot, Zoom AI) already draft content and automate tasks.</a:t>
+            </a:r>
+          </a:p>
+          <a:p>
+            <a:pPr algn="l">
+              <a:spcAft>
+                <a:spcPts val="200"/>
+              </a:spcAft>
+              <a:defRPr sz="800" b="0">
+                <a:solidFill>
+                  <a:srgbClr val="333333"/>
+                </a:solidFill>
+                <a:latin typeface="TT Commons Pro"/>
+              </a:defRPr>
+            </a:pPr>
+          </a:p>
+          <a:p>
+            <a:pPr algn="l">
+              <a:spcAft>
+                <a:spcPts val="200"/>
+              </a:spcAft>
+              <a:defRPr sz="1400" b="1">
+                <a:solidFill>
+                  <a:srgbClr val="333333"/>
+                </a:solidFill>
+                <a:latin typeface="TT Commons Pro"/>
+              </a:defRPr>
+            </a:pPr>
+            <a:r>
+              <a:t>Five-Phase Architecture</a:t>
+            </a:r>
+          </a:p>
+          <a:p>
+            <a:pPr algn="l">
+              <a:spcAft>
+                <a:spcPts val="200"/>
+              </a:spcAft>
+              <a:defRPr sz="400" b="0">
+                <a:solidFill>
+                  <a:srgbClr val="333333"/>
+                </a:solidFill>
+                <a:latin typeface="TT Commons Pro"/>
+              </a:defRPr>
+            </a:pPr>
+          </a:p>
+          <a:p>
+            <a:pPr algn="l">
+              <a:spcAft>
+                <a:spcPts val="200"/>
+              </a:spcAft>
+              <a:defRPr sz="1000" b="0">
+                <a:solidFill>
+                  <a:srgbClr val="333333"/>
+                </a:solidFill>
+                <a:latin typeface="TT Commons Pro"/>
+              </a:defRPr>
+            </a:pPr>
+            <a:r>
+              <a:t>PREPARE: AI generates agendas, auto-slides, predicted Q&amp;A from CRM/Jira/calendar data before the meeting starts</a:t>
+            </a:r>
+          </a:p>
+          <a:p>
+            <a:pPr algn="l">
+              <a:spcAft>
+                <a:spcPts val="200"/>
+              </a:spcAft>
+              <a:defRPr sz="300" b="0">
+                <a:solidFill>
+                  <a:srgbClr val="333333"/>
+                </a:solidFill>
+                <a:latin typeface="TT Commons Pro"/>
+              </a:defRPr>
+            </a:pPr>
+          </a:p>
+          <a:p>
+            <a:pPr algn="l">
+              <a:spcAft>
+                <a:spcPts val="200"/>
+              </a:spcAft>
+              <a:defRPr sz="1000" b="0">
+                <a:solidFill>
+                  <a:srgbClr val="333333"/>
+                </a:solidFill>
+                <a:latin typeface="TT Commons Pro"/>
+              </a:defRPr>
+            </a:pPr>
+            <a:r>
+              <a:t>PERCEIVE: Webex AI Codec processes live audio with DNN noise removal, speech-to-text, and task intent detection</a:t>
+            </a:r>
+          </a:p>
+          <a:p>
+            <a:pPr algn="l">
+              <a:spcAft>
+                <a:spcPts val="200"/>
+              </a:spcAft>
+              <a:defRPr sz="300" b="0">
+                <a:solidFill>
+                  <a:srgbClr val="333333"/>
+                </a:solidFill>
+                <a:latin typeface="TT Commons Pro"/>
+              </a:defRPr>
+            </a:pPr>
+          </a:p>
+          <a:p>
+            <a:pPr algn="l">
+              <a:spcAft>
+                <a:spcPts val="200"/>
+              </a:spcAft>
+              <a:defRPr sz="1000" b="0">
+                <a:solidFill>
+                  <a:srgbClr val="333333"/>
+                </a:solidFill>
+                <a:latin typeface="TT Commons Pro"/>
+              </a:defRPr>
+            </a:pPr>
+            <a:r>
+              <a:t>REASON: A2A protocol retrieves context from Jira, Salesforce, SAP, ServiceNow via Cisco Secure Data Fabric</a:t>
+            </a:r>
+          </a:p>
+          <a:p>
+            <a:pPr algn="l">
+              <a:spcAft>
+                <a:spcPts val="200"/>
+              </a:spcAft>
+              <a:defRPr sz="300" b="0">
+                <a:solidFill>
+                  <a:srgbClr val="333333"/>
+                </a:solidFill>
+                <a:latin typeface="TT Commons Pro"/>
+              </a:defRPr>
+            </a:pPr>
+          </a:p>
+          <a:p>
+            <a:pPr algn="l">
+              <a:spcAft>
+                <a:spcPts val="200"/>
+              </a:spcAft>
+              <a:defRPr sz="1000" b="0">
+                <a:solidFill>
+                  <a:srgbClr val="333333"/>
+                </a:solidFill>
+                <a:latin typeface="TT Commons Pro"/>
+              </a:defRPr>
+            </a:pPr>
+            <a:r>
+              <a:t>ACT: AI drafts tasks, user approves/rejects via in-meeting cards, agent executes through authenticated APIs</a:t>
+            </a:r>
+          </a:p>
+          <a:p>
+            <a:pPr algn="l">
+              <a:spcAft>
+                <a:spcPts val="200"/>
+              </a:spcAft>
+              <a:defRPr sz="300" b="0">
+                <a:solidFill>
+                  <a:srgbClr val="333333"/>
+                </a:solidFill>
+                <a:latin typeface="TT Commons Pro"/>
+              </a:defRPr>
+            </a:pPr>
+          </a:p>
+          <a:p>
+            <a:pPr algn="l">
+              <a:spcAft>
+                <a:spcPts val="200"/>
+              </a:spcAft>
+              <a:defRPr sz="1000" b="0">
+                <a:solidFill>
+                  <a:srgbClr val="333333"/>
+                </a:solidFill>
+                <a:latin typeface="TT Commons Pro"/>
+              </a:defRPr>
+            </a:pPr>
+            <a:r>
+              <a:t>FOLLOW-UP: Detects unanswered questions, drafts responses, delivers via Webex/email with Splunk tracking</a:t>
+            </a:r>
+          </a:p>
+        </p:txBody>
+      </p:sp>
+      <p:sp>
+        <p:nvSpPr>
+          <p:cNvPr id="10" name="TextBox 9"/>
+          <p:cNvSpPr txBox="1"/>
+          <p:nvPr/>
+        </p:nvSpPr>
+        <p:spPr>
+          <a:xfrm>
+            <a:off x="9601200" y="1463040"/>
+            <a:ext cx="7772400" cy="7772400"/>
+          </a:xfrm>
+          <a:prstGeom prst="rect">
+            <a:avLst/>
+          </a:prstGeom>
+          <a:noFill/>
+        </p:spPr>
+        <p:txBody>
+          <a:bodyPr wrap="square">
+            <a:spAutoFit/>
+          </a:bodyPr>
+          <a:lstStyle/>
+          <a:p>
+            <a:pPr algn="l">
+              <a:spcAft>
+                <a:spcPts val="200"/>
+              </a:spcAft>
+              <a:defRPr sz="1400" b="1">
+                <a:solidFill>
+                  <a:srgbClr val="204F69"/>
+                </a:solidFill>
+                <a:latin typeface="TT Commons Pro"/>
+              </a:defRPr>
+            </a:pPr>
+            <a:r>
+              <a:t>Key Differentiators</a:t>
+            </a:r>
+          </a:p>
+          <a:p>
+            <a:pPr algn="l">
+              <a:spcAft>
+                <a:spcPts val="200"/>
+              </a:spcAft>
+              <a:defRPr sz="400" b="0">
+                <a:solidFill>
+                  <a:srgbClr val="204F69"/>
+                </a:solidFill>
+                <a:latin typeface="TT Commons Pro"/>
+              </a:defRPr>
+            </a:pPr>
+          </a:p>
+          <a:p>
+            <a:pPr algn="l">
+              <a:spcAft>
+                <a:spcPts val="200"/>
+              </a:spcAft>
+              <a:defRPr sz="1100" b="0">
+                <a:solidFill>
+                  <a:srgbClr val="204F69"/>
+                </a:solidFill>
+                <a:latin typeface="TT Commons Pro"/>
+              </a:defRPr>
+            </a:pPr>
+            <a:r>
+              <a:t>Human-in-the-loop verification for every action</a:t>
+            </a:r>
+          </a:p>
+          <a:p>
+            <a:pPr algn="l">
+              <a:spcAft>
+                <a:spcPts val="200"/>
+              </a:spcAft>
+              <a:defRPr sz="1100" b="0">
+                <a:solidFill>
+                  <a:srgbClr val="204F69"/>
+                </a:solidFill>
+                <a:latin typeface="TT Commons Pro"/>
+              </a:defRPr>
+            </a:pPr>
+            <a:r>
+              <a:t>Zero-trust data fabric with Splunk audit logging</a:t>
+            </a:r>
+          </a:p>
+          <a:p>
+            <a:pPr algn="l">
+              <a:spcAft>
+                <a:spcPts val="200"/>
+              </a:spcAft>
+              <a:defRPr sz="1100" b="0">
+                <a:solidFill>
+                  <a:srgbClr val="204F69"/>
+                </a:solidFill>
+                <a:latin typeface="TT Commons Pro"/>
+              </a:defRPr>
+            </a:pPr>
+            <a:r>
+              <a:t>Full meeting lifecycle coverage (not just summaries)</a:t>
+            </a:r>
+          </a:p>
+          <a:p>
+            <a:pPr algn="l">
+              <a:spcAft>
+                <a:spcPts val="200"/>
+              </a:spcAft>
+              <a:defRPr sz="800" b="0">
+                <a:solidFill>
+                  <a:srgbClr val="204F69"/>
+                </a:solidFill>
+                <a:latin typeface="TT Commons Pro"/>
+              </a:defRPr>
+            </a:pPr>
+          </a:p>
+          <a:p>
+            <a:pPr algn="l">
+              <a:spcAft>
+                <a:spcPts val="200"/>
+              </a:spcAft>
+              <a:defRPr sz="1400" b="1">
+                <a:solidFill>
+                  <a:srgbClr val="204F69"/>
+                </a:solidFill>
+                <a:latin typeface="TT Commons Pro"/>
+              </a:defRPr>
+            </a:pPr>
+            <a:r>
+              <a:t>Expected Impact</a:t>
+            </a:r>
+          </a:p>
+          <a:p>
+            <a:pPr algn="l">
+              <a:spcAft>
+                <a:spcPts val="200"/>
+              </a:spcAft>
+              <a:defRPr sz="400" b="0">
+                <a:solidFill>
+                  <a:srgbClr val="204F69"/>
+                </a:solidFill>
+                <a:latin typeface="TT Commons Pro"/>
+              </a:defRPr>
+            </a:pPr>
+          </a:p>
+          <a:p>
+            <a:pPr algn="l">
+              <a:spcAft>
+                <a:spcPts val="200"/>
+              </a:spcAft>
+              <a:defRPr sz="1100" b="0">
+                <a:solidFill>
+                  <a:srgbClr val="204F69"/>
+                </a:solidFill>
+                <a:latin typeface="TT Commons Pro"/>
+              </a:defRPr>
+            </a:pPr>
+            <a:r>
+              <a:t>15 min saved per meeting in manual data entry</a:t>
+            </a:r>
+          </a:p>
+          <a:p>
+            <a:pPr algn="l">
+              <a:spcAft>
+                <a:spcPts val="200"/>
+              </a:spcAft>
+              <a:defRPr sz="1100" b="0">
+                <a:solidFill>
+                  <a:srgbClr val="204F69"/>
+                </a:solidFill>
+                <a:latin typeface="TT Commons Pro"/>
+              </a:defRPr>
+            </a:pPr>
+            <a:r>
+              <a:t>25% meeting-to-action rate (vs. 5% industry avg)</a:t>
+            </a:r>
+          </a:p>
+          <a:p>
+            <a:pPr algn="l">
+              <a:spcAft>
+                <a:spcPts val="200"/>
+              </a:spcAft>
+              <a:defRPr sz="1100" b="0">
+                <a:solidFill>
+                  <a:srgbClr val="204F69"/>
+                </a:solidFill>
+                <a:latin typeface="TT Commons Pro"/>
+              </a:defRPr>
+            </a:pPr>
+            <a:r>
+              <a:t>40% workflow automation within 12 months</a:t>
+            </a:r>
+          </a:p>
+          <a:p>
+            <a:pPr algn="l">
+              <a:spcAft>
+                <a:spcPts val="200"/>
+              </a:spcAft>
+              <a:defRPr sz="1100" b="0">
+                <a:solidFill>
+                  <a:srgbClr val="204F69"/>
+                </a:solidFill>
+                <a:latin typeface="TT Commons Pro"/>
+              </a:defRPr>
+            </a:pPr>
+            <a:r>
+              <a:t>85% task accuracy with human verification</a:t>
+            </a:r>
+          </a:p>
+          <a:p>
+            <a:pPr algn="l">
+              <a:spcAft>
+                <a:spcPts val="200"/>
+              </a:spcAft>
+              <a:defRPr sz="1100" b="0">
+                <a:solidFill>
+                  <a:srgbClr val="204F69"/>
+                </a:solidFill>
+                <a:latin typeface="TT Commons Pro"/>
+              </a:defRPr>
+            </a:pPr>
+            <a:r>
+              <a:t>90%+ Q&amp;A resolution rate post-meeting</a:t>
             </a:r>
           </a:p>
         </p:txBody>
@@ -16235,7 +19619,7 @@
                 <a:cs typeface="Lato Bold"/>
                 <a:sym typeface="Lato Bold"/>
               </a:rPr>
-              <a:t>Solution #2</a:t>
+              <a:t>VIBE - Voice &amp; Language Intelligence</a:t>
             </a:r>
           </a:p>
         </p:txBody>
@@ -16341,7 +19725,487 @@
                 <a:cs typeface="Open Sans Bold"/>
                 <a:sym typeface="Open Sans Bold"/>
               </a:rPr>
-              <a:t>Text</a:t>
+              <a:t/>
+            </a:r>
+          </a:p>
+        </p:txBody>
+      </p:sp>
+      <p:sp>
+        <p:nvSpPr>
+          <p:cNvPr id="9" name="TextBox 8"/>
+          <p:cNvSpPr txBox="1"/>
+          <p:nvPr/>
+        </p:nvSpPr>
+        <p:spPr>
+          <a:xfrm>
+            <a:off x="1097280" y="1463040"/>
+            <a:ext cx="7772400" cy="7772400"/>
+          </a:xfrm>
+          <a:prstGeom prst="rect">
+            <a:avLst/>
+          </a:prstGeom>
+          <a:noFill/>
+        </p:spPr>
+        <p:txBody>
+          <a:bodyPr wrap="square">
+            <a:spAutoFit/>
+          </a:bodyPr>
+          <a:lstStyle/>
+          <a:p>
+            <a:pPr algn="l">
+              <a:spcAft>
+                <a:spcPts val="200"/>
+              </a:spcAft>
+              <a:defRPr sz="1300" b="1">
+                <a:solidFill>
+                  <a:srgbClr val="333333"/>
+                </a:solidFill>
+                <a:latin typeface="TT Commons Pro"/>
+              </a:defRPr>
+            </a:pPr>
+            <a:r>
+              <a:t>Problem: Meetings Exclude Non-Native &amp; Non-Tech Users</a:t>
+            </a:r>
+          </a:p>
+          <a:p>
+            <a:pPr algn="l">
+              <a:spcAft>
+                <a:spcPts val="200"/>
+              </a:spcAft>
+              <a:defRPr sz="400" b="0">
+                <a:solidFill>
+                  <a:srgbClr val="333333"/>
+                </a:solidFill>
+                <a:latin typeface="TT Commons Pro"/>
+              </a:defRPr>
+            </a:pPr>
+          </a:p>
+          <a:p>
+            <a:pPr algn="l">
+              <a:spcAft>
+                <a:spcPts val="200"/>
+              </a:spcAft>
+              <a:defRPr sz="1100" b="0">
+                <a:solidFill>
+                  <a:srgbClr val="333333"/>
+                </a:solidFill>
+                <a:latin typeface="TT Commons Pro"/>
+              </a:defRPr>
+            </a:pPr>
+            <a:r>
+              <a:t>Language barriers, jargon, poor audio, and inability to speak create systemic exclusion in global meetings.</a:t>
+            </a:r>
+          </a:p>
+          <a:p>
+            <a:pPr algn="l">
+              <a:spcAft>
+                <a:spcPts val="200"/>
+              </a:spcAft>
+              <a:defRPr sz="800" b="0">
+                <a:solidFill>
+                  <a:srgbClr val="333333"/>
+                </a:solidFill>
+                <a:latin typeface="TT Commons Pro"/>
+              </a:defRPr>
+            </a:pPr>
+          </a:p>
+          <a:p>
+            <a:pPr algn="l">
+              <a:spcAft>
+                <a:spcPts val="200"/>
+              </a:spcAft>
+              <a:defRPr sz="1400" b="1">
+                <a:solidFill>
+                  <a:srgbClr val="333333"/>
+                </a:solidFill>
+                <a:latin typeface="TT Commons Pro"/>
+              </a:defRPr>
+            </a:pPr>
+            <a:r>
+              <a:t>VIBE Capabilities</a:t>
+            </a:r>
+          </a:p>
+          <a:p>
+            <a:pPr algn="l">
+              <a:spcAft>
+                <a:spcPts val="200"/>
+              </a:spcAft>
+              <a:defRPr sz="400" b="0">
+                <a:solidFill>
+                  <a:srgbClr val="333333"/>
+                </a:solidFill>
+                <a:latin typeface="TT Commons Pro"/>
+              </a:defRPr>
+            </a:pPr>
+          </a:p>
+          <a:p>
+            <a:pPr algn="l">
+              <a:spcAft>
+                <a:spcPts val="200"/>
+              </a:spcAft>
+              <a:defRPr sz="1000" b="0">
+                <a:solidFill>
+                  <a:srgbClr val="333333"/>
+                </a:solidFill>
+                <a:latin typeface="TT Commons Pro"/>
+              </a:defRPr>
+            </a:pPr>
+            <a:r>
+              <a:t>Voice Boost: DNN noise removal (150+ types), echo cancel, auto gain, environment-adaptive EQ presets</a:t>
+            </a:r>
+          </a:p>
+          <a:p>
+            <a:pPr algn="l">
+              <a:spcAft>
+                <a:spcPts val="200"/>
+              </a:spcAft>
+              <a:defRPr sz="300" b="0">
+                <a:solidFill>
+                  <a:srgbClr val="333333"/>
+                </a:solidFill>
+                <a:latin typeface="TT Commons Pro"/>
+              </a:defRPr>
+            </a:pPr>
+          </a:p>
+          <a:p>
+            <a:pPr algn="l">
+              <a:spcAft>
+                <a:spcPts val="200"/>
+              </a:spcAft>
+              <a:defRPr sz="1000" b="0">
+                <a:solidFill>
+                  <a:srgbClr val="333333"/>
+                </a:solidFill>
+                <a:latin typeface="TT Commons Pro"/>
+              </a:defRPr>
+            </a:pPr>
+            <a:r>
+              <a:t>Live Translation: 100+ languages, real-time ASR + neural machine translation + TTS delivery</a:t>
+            </a:r>
+          </a:p>
+          <a:p>
+            <a:pPr algn="l">
+              <a:spcAft>
+                <a:spcPts val="200"/>
+              </a:spcAft>
+              <a:defRPr sz="300" b="0">
+                <a:solidFill>
+                  <a:srgbClr val="333333"/>
+                </a:solidFill>
+                <a:latin typeface="TT Commons Pro"/>
+              </a:defRPr>
+            </a:pPr>
+          </a:p>
+          <a:p>
+            <a:pPr algn="l">
+              <a:spcAft>
+                <a:spcPts val="200"/>
+              </a:spcAft>
+              <a:defRPr sz="1000" b="0">
+                <a:solidFill>
+                  <a:srgbClr val="333333"/>
+                </a:solidFill>
+                <a:latin typeface="TT Commons Pro"/>
+              </a:defRPr>
+            </a:pPr>
+            <a:r>
+              <a:t>Type-to-Speak: Users type in any language, VIBE speaks aloud for them. Labeled "Spoken by VIBE for [User]"</a:t>
+            </a:r>
+          </a:p>
+          <a:p>
+            <a:pPr algn="l">
+              <a:spcAft>
+                <a:spcPts val="200"/>
+              </a:spcAft>
+              <a:defRPr sz="300" b="0">
+                <a:solidFill>
+                  <a:srgbClr val="333333"/>
+                </a:solidFill>
+                <a:latin typeface="TT Commons Pro"/>
+              </a:defRPr>
+            </a:pPr>
+          </a:p>
+          <a:p>
+            <a:pPr algn="l">
+              <a:spcAft>
+                <a:spcPts val="200"/>
+              </a:spcAft>
+              <a:defRPr sz="1000" b="0">
+                <a:solidFill>
+                  <a:srgbClr val="333333"/>
+                </a:solidFill>
+                <a:latin typeface="TT Commons Pro"/>
+              </a:defRPr>
+            </a:pPr>
+            <a:r>
+              <a:t>Simple Mode: Jargon to plain language with analogies (e.g., "API = power outlet for apps")</a:t>
+            </a:r>
+          </a:p>
+          <a:p>
+            <a:pPr algn="l">
+              <a:spcAft>
+                <a:spcPts val="200"/>
+              </a:spcAft>
+              <a:defRPr sz="300" b="0">
+                <a:solidFill>
+                  <a:srgbClr val="333333"/>
+                </a:solidFill>
+                <a:latin typeface="TT Commons Pro"/>
+              </a:defRPr>
+            </a:pPr>
+          </a:p>
+          <a:p>
+            <a:pPr algn="l">
+              <a:spcAft>
+                <a:spcPts val="200"/>
+              </a:spcAft>
+              <a:defRPr sz="1000" b="0">
+                <a:solidFill>
+                  <a:srgbClr val="333333"/>
+                </a:solidFill>
+                <a:latin typeface="TT Commons Pro"/>
+              </a:defRPr>
+            </a:pPr>
+            <a:r>
+              <a:t>Q&amp;A Close-Loop: Non-native user asks in Hindi, presenter answers in English, VIBE translates + simplifies back</a:t>
+            </a:r>
+          </a:p>
+        </p:txBody>
+      </p:sp>
+      <p:sp>
+        <p:nvSpPr>
+          <p:cNvPr id="10" name="TextBox 9"/>
+          <p:cNvSpPr txBox="1"/>
+          <p:nvPr/>
+        </p:nvSpPr>
+        <p:spPr>
+          <a:xfrm>
+            <a:off x="9601200" y="1463040"/>
+            <a:ext cx="7772400" cy="7772400"/>
+          </a:xfrm>
+          <a:prstGeom prst="rect">
+            <a:avLst/>
+          </a:prstGeom>
+          <a:noFill/>
+        </p:spPr>
+        <p:txBody>
+          <a:bodyPr wrap="square">
+            <a:spAutoFit/>
+          </a:bodyPr>
+          <a:lstStyle/>
+          <a:p>
+            <a:pPr algn="l">
+              <a:spcAft>
+                <a:spcPts val="200"/>
+              </a:spcAft>
+              <a:defRPr sz="1400" b="1">
+                <a:solidFill>
+                  <a:srgbClr val="204F69"/>
+                </a:solidFill>
+                <a:latin typeface="TT Commons Pro"/>
+              </a:defRPr>
+            </a:pPr>
+            <a:r>
+              <a:t>Privacy &amp; Trust</a:t>
+            </a:r>
+          </a:p>
+          <a:p>
+            <a:pPr algn="l">
+              <a:spcAft>
+                <a:spcPts val="200"/>
+              </a:spcAft>
+              <a:defRPr sz="400" b="0">
+                <a:solidFill>
+                  <a:srgbClr val="204F69"/>
+                </a:solidFill>
+                <a:latin typeface="TT Commons Pro"/>
+              </a:defRPr>
+            </a:pPr>
+          </a:p>
+          <a:p>
+            <a:pPr algn="l">
+              <a:spcAft>
+                <a:spcPts val="200"/>
+              </a:spcAft>
+              <a:defRPr sz="1100" b="0">
+                <a:solidFill>
+                  <a:srgbClr val="204F69"/>
+                </a:solidFill>
+                <a:latin typeface="TT Commons Pro"/>
+              </a:defRPr>
+            </a:pPr>
+            <a:r>
+              <a:t>Every TTS output labeled - VIBE never impersonates</a:t>
+            </a:r>
+          </a:p>
+          <a:p>
+            <a:pPr algn="l">
+              <a:spcAft>
+                <a:spcPts val="200"/>
+              </a:spcAft>
+              <a:defRPr sz="1100" b="0">
+                <a:solidFill>
+                  <a:srgbClr val="204F69"/>
+                </a:solidFill>
+                <a:latin typeface="TT Commons Pro"/>
+              </a:defRPr>
+            </a:pPr>
+            <a:r>
+              <a:t>Full audit trail via Splunk observability</a:t>
+            </a:r>
+          </a:p>
+          <a:p>
+            <a:pPr algn="l">
+              <a:spcAft>
+                <a:spcPts val="200"/>
+              </a:spcAft>
+              <a:defRPr sz="1100" b="0">
+                <a:solidFill>
+                  <a:srgbClr val="204F69"/>
+                </a:solidFill>
+                <a:latin typeface="TT Commons Pro"/>
+              </a:defRPr>
+            </a:pPr>
+            <a:r>
+              <a:t>Zero data retention option available</a:t>
+            </a:r>
+          </a:p>
+          <a:p>
+            <a:pPr algn="l">
+              <a:spcAft>
+                <a:spcPts val="200"/>
+              </a:spcAft>
+              <a:defRPr sz="800" b="0">
+                <a:solidFill>
+                  <a:srgbClr val="204F69"/>
+                </a:solidFill>
+                <a:latin typeface="TT Commons Pro"/>
+              </a:defRPr>
+            </a:pPr>
+          </a:p>
+          <a:p>
+            <a:pPr algn="l">
+              <a:spcAft>
+                <a:spcPts val="200"/>
+              </a:spcAft>
+              <a:defRPr sz="1400" b="1">
+                <a:solidFill>
+                  <a:srgbClr val="204F69"/>
+                </a:solidFill>
+                <a:latin typeface="TT Commons Pro"/>
+              </a:defRPr>
+            </a:pPr>
+            <a:r>
+              <a:t>KPI Targets</a:t>
+            </a:r>
+          </a:p>
+          <a:p>
+            <a:pPr algn="l">
+              <a:spcAft>
+                <a:spcPts val="200"/>
+              </a:spcAft>
+              <a:defRPr sz="400" b="0">
+                <a:solidFill>
+                  <a:srgbClr val="204F69"/>
+                </a:solidFill>
+                <a:latin typeface="TT Commons Pro"/>
+              </a:defRPr>
+            </a:pPr>
+          </a:p>
+          <a:p>
+            <a:pPr algn="l">
+              <a:spcAft>
+                <a:spcPts val="200"/>
+              </a:spcAft>
+              <a:defRPr sz="1100" b="0">
+                <a:solidFill>
+                  <a:srgbClr val="204F69"/>
+                </a:solidFill>
+                <a:latin typeface="TT Commons Pro"/>
+              </a:defRPr>
+            </a:pPr>
+            <a:r>
+              <a:t>Noise reduction: 95%+</a:t>
+            </a:r>
+          </a:p>
+          <a:p>
+            <a:pPr algn="l">
+              <a:spcAft>
+                <a:spcPts val="200"/>
+              </a:spcAft>
+              <a:defRPr sz="1100" b="0">
+                <a:solidFill>
+                  <a:srgbClr val="204F69"/>
+                </a:solidFill>
+                <a:latin typeface="TT Commons Pro"/>
+              </a:defRPr>
+            </a:pPr>
+            <a:r>
+              <a:t>ASR accuracy: 98%</a:t>
+            </a:r>
+          </a:p>
+          <a:p>
+            <a:pPr algn="l">
+              <a:spcAft>
+                <a:spcPts val="200"/>
+              </a:spcAft>
+              <a:defRPr sz="1100" b="0">
+                <a:solidFill>
+                  <a:srgbClr val="204F69"/>
+                </a:solidFill>
+                <a:latin typeface="TT Commons Pro"/>
+              </a:defRPr>
+            </a:pPr>
+            <a:r>
+              <a:t>Translation latency: &lt; 1 second</a:t>
+            </a:r>
+          </a:p>
+          <a:p>
+            <a:pPr algn="l">
+              <a:spcAft>
+                <a:spcPts val="200"/>
+              </a:spcAft>
+              <a:defRPr sz="1100" b="0">
+                <a:solidFill>
+                  <a:srgbClr val="204F69"/>
+                </a:solidFill>
+                <a:latin typeface="TT Commons Pro"/>
+              </a:defRPr>
+            </a:pPr>
+            <a:r>
+              <a:t>TTS naturalness: 4.5 / 5 user rating</a:t>
+            </a:r>
+          </a:p>
+          <a:p>
+            <a:pPr algn="l">
+              <a:spcAft>
+                <a:spcPts val="200"/>
+              </a:spcAft>
+              <a:defRPr sz="1100" b="0">
+                <a:solidFill>
+                  <a:srgbClr val="204F69"/>
+                </a:solidFill>
+                <a:latin typeface="TT Commons Pro"/>
+              </a:defRPr>
+            </a:pPr>
+            <a:r>
+              <a:t>Type-to-speak delivery: &lt; 2 seconds</a:t>
+            </a:r>
+          </a:p>
+          <a:p>
+            <a:pPr algn="l">
+              <a:spcAft>
+                <a:spcPts val="200"/>
+              </a:spcAft>
+              <a:defRPr sz="1100" b="0">
+                <a:solidFill>
+                  <a:srgbClr val="204F69"/>
+                </a:solidFill>
+                <a:latin typeface="TT Commons Pro"/>
+              </a:defRPr>
+            </a:pPr>
+            <a:r>
+              <a:t>+40% non-native speaker participation</a:t>
             </a:r>
           </a:p>
         </p:txBody>
@@ -16579,7 +20443,7 @@
                 <a:cs typeface="Lato Bold"/>
                 <a:sym typeface="Lato Bold"/>
               </a:rPr>
-              <a:t>Solution #3</a:t>
+              <a:t>Secure AI Agent Marketplace</a:t>
             </a:r>
           </a:p>
         </p:txBody>
@@ -16685,7 +20549,458 @@
                 <a:cs typeface="Open Sans Bold"/>
                 <a:sym typeface="Open Sans Bold"/>
               </a:rPr>
-              <a:t>Text</a:t>
+              <a:t/>
+            </a:r>
+          </a:p>
+        </p:txBody>
+      </p:sp>
+      <p:sp>
+        <p:nvSpPr>
+          <p:cNvPr id="9" name="TextBox 8"/>
+          <p:cNvSpPr txBox="1"/>
+          <p:nvPr/>
+        </p:nvSpPr>
+        <p:spPr>
+          <a:xfrm>
+            <a:off x="1097280" y="1463040"/>
+            <a:ext cx="7772400" cy="7772400"/>
+          </a:xfrm>
+          <a:prstGeom prst="rect">
+            <a:avLst/>
+          </a:prstGeom>
+          <a:noFill/>
+        </p:spPr>
+        <p:txBody>
+          <a:bodyPr wrap="square">
+            <a:spAutoFit/>
+          </a:bodyPr>
+          <a:lstStyle/>
+          <a:p>
+            <a:pPr algn="l">
+              <a:spcAft>
+                <a:spcPts val="200"/>
+              </a:spcAft>
+              <a:defRPr sz="1400" b="1">
+                <a:solidFill>
+                  <a:srgbClr val="333333"/>
+                </a:solidFill>
+                <a:latin typeface="TT Commons Pro"/>
+              </a:defRPr>
+            </a:pPr>
+            <a:r>
+              <a:t>Problem: Weaker Developer Ecosystem</a:t>
+            </a:r>
+          </a:p>
+          <a:p>
+            <a:pPr algn="l">
+              <a:spcAft>
+                <a:spcPts val="200"/>
+              </a:spcAft>
+              <a:defRPr sz="400" b="0">
+                <a:solidFill>
+                  <a:srgbClr val="333333"/>
+                </a:solidFill>
+                <a:latin typeface="TT Commons Pro"/>
+              </a:defRPr>
+            </a:pPr>
+          </a:p>
+          <a:p>
+            <a:pPr algn="l">
+              <a:spcAft>
+                <a:spcPts val="200"/>
+              </a:spcAft>
+              <a:defRPr sz="1100" b="0">
+                <a:solidFill>
+                  <a:srgbClr val="333333"/>
+                </a:solidFill>
+                <a:latin typeface="TT Commons Pro"/>
+              </a:defRPr>
+            </a:pPr>
+            <a:r>
+              <a:t>Teams: 2,000+ integrations. Zoom: 2,500+. No platform has a dedicated AI agent marketplace. Webex can be first.</a:t>
+            </a:r>
+          </a:p>
+          <a:p>
+            <a:pPr algn="l">
+              <a:spcAft>
+                <a:spcPts val="200"/>
+              </a:spcAft>
+              <a:defRPr sz="800" b="0">
+                <a:solidFill>
+                  <a:srgbClr val="333333"/>
+                </a:solidFill>
+                <a:latin typeface="TT Commons Pro"/>
+              </a:defRPr>
+            </a:pPr>
+          </a:p>
+          <a:p>
+            <a:pPr algn="l">
+              <a:spcAft>
+                <a:spcPts val="200"/>
+              </a:spcAft>
+              <a:defRPr sz="1400" b="1">
+                <a:solidFill>
+                  <a:srgbClr val="333333"/>
+                </a:solidFill>
+                <a:latin typeface="TT Commons Pro"/>
+              </a:defRPr>
+            </a:pPr>
+            <a:r>
+              <a:t>Four-Stage Lifecycle</a:t>
+            </a:r>
+          </a:p>
+          <a:p>
+            <a:pPr algn="l">
+              <a:spcAft>
+                <a:spcPts val="200"/>
+              </a:spcAft>
+              <a:defRPr sz="400" b="0">
+                <a:solidFill>
+                  <a:srgbClr val="333333"/>
+                </a:solidFill>
+                <a:latin typeface="TT Commons Pro"/>
+              </a:defRPr>
+            </a:pPr>
+          </a:p>
+          <a:p>
+            <a:pPr algn="l">
+              <a:spcAft>
+                <a:spcPts val="200"/>
+              </a:spcAft>
+              <a:defRPr sz="1000" b="0">
+                <a:solidFill>
+                  <a:srgbClr val="333333"/>
+                </a:solidFill>
+                <a:latin typeface="TT Commons Pro"/>
+              </a:defRPr>
+            </a:pPr>
+            <a:r>
+              <a:t>BUILD: Python/JS SDK, agent templates (CRM Updater, Ticket Creator, Doc Generator), sandbox testing environment</a:t>
+            </a:r>
+          </a:p>
+          <a:p>
+            <a:pPr algn="l">
+              <a:spcAft>
+                <a:spcPts val="200"/>
+              </a:spcAft>
+              <a:defRPr sz="300" b="0">
+                <a:solidFill>
+                  <a:srgbClr val="333333"/>
+                </a:solidFill>
+                <a:latin typeface="TT Commons Pro"/>
+              </a:defRPr>
+            </a:pPr>
+          </a:p>
+          <a:p>
+            <a:pPr algn="l">
+              <a:spcAft>
+                <a:spcPts val="200"/>
+              </a:spcAft>
+              <a:defRPr sz="1000" b="0">
+                <a:solidFill>
+                  <a:srgbClr val="333333"/>
+                </a:solidFill>
+                <a:latin typeface="TT Commons Pro"/>
+              </a:defRPr>
+            </a:pPr>
+            <a:r>
+              <a:t>CERTIFY: Cisco security pipeline - static code analysis, permission review, SOC2/HIPAA/FedRAMP/GDPR compliance</a:t>
+            </a:r>
+          </a:p>
+          <a:p>
+            <a:pPr algn="l">
+              <a:spcAft>
+                <a:spcPts val="200"/>
+              </a:spcAft>
+              <a:defRPr sz="300" b="0">
+                <a:solidFill>
+                  <a:srgbClr val="333333"/>
+                </a:solidFill>
+                <a:latin typeface="TT Commons Pro"/>
+              </a:defRPr>
+            </a:pPr>
+          </a:p>
+          <a:p>
+            <a:pPr algn="l">
+              <a:spcAft>
+                <a:spcPts val="200"/>
+              </a:spcAft>
+              <a:defRPr sz="1000" b="0">
+                <a:solidFill>
+                  <a:srgbClr val="333333"/>
+                </a:solidFill>
+                <a:latin typeface="TT Commons Pro"/>
+              </a:defRPr>
+            </a:pPr>
+            <a:r>
+              <a:t>DEPLOY: Enterprise admins browse by industry, configure permissions, set approval workflows, pilot rollout</a:t>
+            </a:r>
+          </a:p>
+          <a:p>
+            <a:pPr algn="l">
+              <a:spcAft>
+                <a:spcPts val="200"/>
+              </a:spcAft>
+              <a:defRPr sz="300" b="0">
+                <a:solidFill>
+                  <a:srgbClr val="333333"/>
+                </a:solidFill>
+                <a:latin typeface="TT Commons Pro"/>
+              </a:defRPr>
+            </a:pPr>
+          </a:p>
+          <a:p>
+            <a:pPr algn="l">
+              <a:spcAft>
+                <a:spcPts val="200"/>
+              </a:spcAft>
+              <a:defRPr sz="1000" b="0">
+                <a:solidFill>
+                  <a:srgbClr val="333333"/>
+                </a:solidFill>
+                <a:latin typeface="TT Commons Pro"/>
+              </a:defRPr>
+            </a:pPr>
+            <a:r>
+              <a:t>MONITOR: Splunk-powered dashboards, ML anomaly detection, instant kill-switch, full audit trail</a:t>
+            </a:r>
+          </a:p>
+        </p:txBody>
+      </p:sp>
+      <p:sp>
+        <p:nvSpPr>
+          <p:cNvPr id="10" name="TextBox 9"/>
+          <p:cNvSpPr txBox="1"/>
+          <p:nvPr/>
+        </p:nvSpPr>
+        <p:spPr>
+          <a:xfrm>
+            <a:off x="9601200" y="1463040"/>
+            <a:ext cx="7772400" cy="7772400"/>
+          </a:xfrm>
+          <a:prstGeom prst="rect">
+            <a:avLst/>
+          </a:prstGeom>
+          <a:noFill/>
+        </p:spPr>
+        <p:txBody>
+          <a:bodyPr wrap="square">
+            <a:spAutoFit/>
+          </a:bodyPr>
+          <a:lstStyle/>
+          <a:p>
+            <a:pPr algn="l">
+              <a:spcAft>
+                <a:spcPts val="200"/>
+              </a:spcAft>
+              <a:defRPr sz="1400" b="1">
+                <a:solidFill>
+                  <a:srgbClr val="204F69"/>
+                </a:solidFill>
+                <a:latin typeface="TT Commons Pro"/>
+              </a:defRPr>
+            </a:pPr>
+            <a:r>
+              <a:t>Three-Lane Architecture</a:t>
+            </a:r>
+          </a:p>
+          <a:p>
+            <a:pPr algn="l">
+              <a:spcAft>
+                <a:spcPts val="200"/>
+              </a:spcAft>
+              <a:defRPr sz="400" b="0">
+                <a:solidFill>
+                  <a:srgbClr val="204F69"/>
+                </a:solidFill>
+                <a:latin typeface="TT Commons Pro"/>
+              </a:defRPr>
+            </a:pPr>
+          </a:p>
+          <a:p>
+            <a:pPr algn="l">
+              <a:spcAft>
+                <a:spcPts val="200"/>
+              </a:spcAft>
+              <a:defRPr sz="1100" b="0">
+                <a:solidFill>
+                  <a:srgbClr val="204F69"/>
+                </a:solidFill>
+                <a:latin typeface="TT Commons Pro"/>
+              </a:defRPr>
+            </a:pPr>
+            <a:r>
+              <a:t>Developer Journey: Build, test, submit for certification</a:t>
+            </a:r>
+          </a:p>
+          <a:p>
+            <a:pPr algn="l">
+              <a:spcAft>
+                <a:spcPts val="200"/>
+              </a:spcAft>
+              <a:defRPr sz="1100" b="0">
+                <a:solidFill>
+                  <a:srgbClr val="204F69"/>
+                </a:solidFill>
+                <a:latin typeface="TT Commons Pro"/>
+              </a:defRPr>
+            </a:pPr>
+            <a:r>
+              <a:t>Admin Journey: Browse, deploy, monitor, kill-switch</a:t>
+            </a:r>
+          </a:p>
+          <a:p>
+            <a:pPr algn="l">
+              <a:spcAft>
+                <a:spcPts val="200"/>
+              </a:spcAft>
+              <a:defRPr sz="1100" b="0">
+                <a:solidFill>
+                  <a:srgbClr val="204F69"/>
+                </a:solidFill>
+                <a:latin typeface="TT Commons Pro"/>
+              </a:defRPr>
+            </a:pPr>
+            <a:r>
+              <a:t>User Journey: Discover, install, approve actions in-meeting</a:t>
+            </a:r>
+          </a:p>
+          <a:p>
+            <a:pPr algn="l">
+              <a:spcAft>
+                <a:spcPts val="200"/>
+              </a:spcAft>
+              <a:defRPr sz="800" b="0">
+                <a:solidFill>
+                  <a:srgbClr val="204F69"/>
+                </a:solidFill>
+                <a:latin typeface="TT Commons Pro"/>
+              </a:defRPr>
+            </a:pPr>
+          </a:p>
+          <a:p>
+            <a:pPr algn="l">
+              <a:spcAft>
+                <a:spcPts val="200"/>
+              </a:spcAft>
+              <a:defRPr sz="1400" b="1">
+                <a:solidFill>
+                  <a:srgbClr val="204F69"/>
+                </a:solidFill>
+                <a:latin typeface="TT Commons Pro"/>
+              </a:defRPr>
+            </a:pPr>
+            <a:r>
+              <a:t>Projected Impact</a:t>
+            </a:r>
+          </a:p>
+          <a:p>
+            <a:pPr algn="l">
+              <a:spcAft>
+                <a:spcPts val="200"/>
+              </a:spcAft>
+              <a:defRPr sz="400" b="0">
+                <a:solidFill>
+                  <a:srgbClr val="204F69"/>
+                </a:solidFill>
+                <a:latin typeface="TT Commons Pro"/>
+              </a:defRPr>
+            </a:pPr>
+          </a:p>
+          <a:p>
+            <a:pPr algn="l">
+              <a:spcAft>
+                <a:spcPts val="200"/>
+              </a:spcAft>
+              <a:defRPr sz="1100" b="0">
+                <a:solidFill>
+                  <a:srgbClr val="204F69"/>
+                </a:solidFill>
+                <a:latin typeface="TT Commons Pro"/>
+              </a:defRPr>
+            </a:pPr>
+            <a:r>
+              <a:t>500+ certified agents in Year 1</a:t>
+            </a:r>
+          </a:p>
+          <a:p>
+            <a:pPr algn="l">
+              <a:spcAft>
+                <a:spcPts val="200"/>
+              </a:spcAft>
+              <a:defRPr sz="1100" b="0">
+                <a:solidFill>
+                  <a:srgbClr val="204F69"/>
+                </a:solidFill>
+                <a:latin typeface="TT Commons Pro"/>
+              </a:defRPr>
+            </a:pPr>
+            <a:r>
+              <a:t>$150M GMV by FY2028</a:t>
+            </a:r>
+          </a:p>
+          <a:p>
+            <a:pPr algn="l">
+              <a:spcAft>
+                <a:spcPts val="200"/>
+              </a:spcAft>
+              <a:defRPr sz="1100" b="0">
+                <a:solidFill>
+                  <a:srgbClr val="204F69"/>
+                </a:solidFill>
+                <a:latin typeface="TT Commons Pro"/>
+              </a:defRPr>
+            </a:pPr>
+            <a:r>
+              <a:t>3x developer ecosystem growth in 18 months</a:t>
+            </a:r>
+          </a:p>
+          <a:p>
+            <a:pPr algn="l">
+              <a:spcAft>
+                <a:spcPts val="200"/>
+              </a:spcAft>
+              <a:defRPr sz="1100" b="0">
+                <a:solidFill>
+                  <a:srgbClr val="204F69"/>
+                </a:solidFill>
+                <a:latin typeface="TT Commons Pro"/>
+              </a:defRPr>
+            </a:pPr>
+            <a:r>
+              <a:t>85% enterprise renewal rate</a:t>
+            </a:r>
+          </a:p>
+          <a:p>
+            <a:pPr algn="l">
+              <a:spcAft>
+                <a:spcPts val="200"/>
+              </a:spcAft>
+              <a:defRPr sz="1100" b="0">
+                <a:solidFill>
+                  <a:srgbClr val="204F69"/>
+                </a:solidFill>
+                <a:latin typeface="TT Commons Pro"/>
+              </a:defRPr>
+            </a:pPr>
+            <a:r>
+              <a:t>$50M annual marketplace commission by FY2029</a:t>
+            </a:r>
+          </a:p>
+          <a:p>
+            <a:pPr algn="l">
+              <a:spcAft>
+                <a:spcPts val="200"/>
+              </a:spcAft>
+              <a:defRPr sz="1100" b="0">
+                <a:solidFill>
+                  <a:srgbClr val="204F69"/>
+                </a:solidFill>
+                <a:latin typeface="TT Commons Pro"/>
+              </a:defRPr>
+            </a:pPr>
+            <a:r>
+              <a:t>70/30 developer-favoring revenue split</a:t>
             </a:r>
           </a:p>
         </p:txBody>
